--- a/library/lectures/lec-07/rework/deck/tri-kadra-o-cheloveke.pptx
+++ b/library/lectures/lec-07/rework/deck/tri-kadra-o-cheloveke.pptx
@@ -4774,11 +4774,11 @@
         <p:spPr>
           <a:xfrm>
             <a:off x="374904" y="2771373"/>
-            <a:ext cx="11441887" cy="1848525"/>
+            <a:ext cx="11441887" cy="3464834"/>
           </a:xfrm>
           <a:prstGeom prst="roundRect">
             <a:avLst>
-              <a:gd name="adj" fmla="val 16488"/>
+              <a:gd name="adj" fmla="val 8796"/>
             </a:avLst>
           </a:prstGeom>
           <a:solidFill>
@@ -4808,7 +4808,7 @@
         <p:spPr>
           <a:xfrm>
             <a:off x="539496" y="2862813"/>
-            <a:ext cx="5373471" cy="3373394"/>
+            <a:ext cx="11112703" cy="3373394"/>
           </a:xfrm>
           <a:prstGeom prst="rect">
             <a:avLst/>
@@ -4823,11 +4823,11 @@
           <a:p>
             <a:pPr algn="l">
               <a:lnSpc>
-                <a:spcPct val="126000"/>
+                <a:spcPct val="118000"/>
               </a:lnSpc>
             </a:pPr>
             <a:r>
-              <a:rPr sz="1500" b="1" i="0">
+              <a:rPr sz="1400" b="1" i="0">
                 <a:solidFill>
                   <a:srgbClr val="21295C"/>
                 </a:solidFill>
@@ -4839,14 +4839,14 @@
           <a:p>
             <a:pPr algn="l">
               <a:lnSpc>
-                <a:spcPct val="126000"/>
+                <a:spcPct val="118000"/>
               </a:lnSpc>
               <a:spcBef>
-                <a:spcPts val="700"/>
+                <a:spcPts val="600"/>
               </a:spcBef>
             </a:pPr>
             <a:r>
-              <a:rPr sz="1500" b="0" i="0">
+              <a:rPr sz="1400" b="0" i="0">
                 <a:solidFill>
                   <a:srgbClr val="21295C"/>
                 </a:solidFill>
@@ -4855,7 +4855,7 @@
               <a:t/>
             </a:r>
             <a:r>
-              <a:rPr sz="1500" b="1" i="0">
+              <a:rPr sz="1400" b="1" i="0">
                 <a:solidFill>
                   <a:srgbClr val="21295C"/>
                 </a:solidFill>
@@ -4864,7 +4864,7 @@
               <a:t>Со стороны врача</a:t>
             </a:r>
             <a:r>
-              <a:rPr sz="1500" b="0" i="0">
+              <a:rPr sz="1400" b="0" i="0">
                 <a:solidFill>
                   <a:srgbClr val="21295C"/>
                 </a:solidFill>
@@ -4873,7 +4873,7 @@
               <a:t> меняется то, </a:t>
             </a:r>
             <a:r>
-              <a:rPr sz="1500" b="1" i="0">
+              <a:rPr sz="1400" b="1" i="0">
                 <a:solidFill>
                   <a:srgbClr val="21295C"/>
                 </a:solidFill>
@@ -4882,7 +4882,7 @@
               <a:t>как он принимает решение</a:t>
             </a:r>
             <a:r>
-              <a:rPr sz="1500" b="0" i="0">
+              <a:rPr sz="1400" b="0" i="0">
                 <a:solidFill>
                   <a:srgbClr val="21295C"/>
                 </a:solidFill>
@@ -4891,37 +4891,26 @@
               <a:t>: на что смотрит, чему верит, что умеет без помощника.</a:t>
             </a:r>
           </a:p>
-        </p:txBody>
-      </p:sp>
-      <p:sp>
-        <p:nvSpPr>
-          <p:cNvPr id="28" name="TextBox 27"/>
-          <p:cNvSpPr txBox="1"/>
-          <p:nvPr/>
-        </p:nvSpPr>
-        <p:spPr>
-          <a:xfrm>
-            <a:off x="6278727" y="2862813"/>
-            <a:ext cx="5373471" cy="3373394"/>
-          </a:xfrm>
-          <a:prstGeom prst="rect">
-            <a:avLst/>
-          </a:prstGeom>
-          <a:noFill/>
-        </p:spPr>
-        <p:txBody>
-          <a:bodyPr wrap="square" lIns="0" rIns="0" tIns="0" bIns="0" anchor="t">
-            <a:spAutoFit/>
-          </a:bodyPr>
-          <a:lstStyle/>
           <a:p>
             <a:pPr algn="l">
               <a:lnSpc>
-                <a:spcPct val="126000"/>
+                <a:spcPct val="118000"/>
               </a:lnSpc>
+              <a:spcBef>
+                <a:spcPts val="600"/>
+              </a:spcBef>
             </a:pPr>
             <a:r>
-              <a:rPr sz="1500" b="1" i="0">
+              <a:rPr sz="1400" b="0" i="0">
+                <a:solidFill>
+                  <a:srgbClr val="21295C"/>
+                </a:solidFill>
+                <a:latin typeface="Arial"/>
+              </a:rPr>
+              <a:t/>
+            </a:r>
+            <a:r>
+              <a:rPr sz="1400" b="1" i="0">
                 <a:solidFill>
                   <a:srgbClr val="21295C"/>
                 </a:solidFill>
@@ -4930,7 +4919,7 @@
               <a:t>Со стороны пациента</a:t>
             </a:r>
             <a:r>
-              <a:rPr sz="1500" b="0" i="0">
+              <a:rPr sz="1400" b="0" i="0">
                 <a:solidFill>
                   <a:srgbClr val="21295C"/>
                 </a:solidFill>
@@ -4939,7 +4928,7 @@
               <a:t> меняется то, </a:t>
             </a:r>
             <a:r>
-              <a:rPr sz="1500" b="1" i="0">
+              <a:rPr sz="1400" b="1" i="0">
                 <a:solidFill>
                   <a:srgbClr val="21295C"/>
                 </a:solidFill>
@@ -4948,7 +4937,7 @@
               <a:t>согласен ли он с решением</a:t>
             </a:r>
             <a:r>
-              <a:rPr sz="1500" b="0" i="0">
+              <a:rPr sz="1400" b="0" i="0">
                 <a:solidFill>
                   <a:srgbClr val="21295C"/>
                 </a:solidFill>
@@ -4960,14 +4949,14 @@
           <a:p>
             <a:pPr algn="l">
               <a:lnSpc>
-                <a:spcPct val="126000"/>
+                <a:spcPct val="118000"/>
               </a:lnSpc>
               <a:spcBef>
-                <a:spcPts val="700"/>
+                <a:spcPts val="600"/>
               </a:spcBef>
             </a:pPr>
             <a:r>
-              <a:rPr sz="1500" b="0" i="0">
+              <a:rPr sz="1400" b="0" i="0">
                 <a:solidFill>
                   <a:srgbClr val="21295C"/>
                 </a:solidFill>
@@ -4976,7 +4965,7 @@
               <a:t/>
             </a:r>
             <a:r>
-              <a:rPr sz="1500" b="1" i="0">
+              <a:rPr sz="1400" b="1" i="0">
                 <a:solidFill>
                   <a:srgbClr val="21295C"/>
                 </a:solidFill>
@@ -4989,37 +4978,7 @@
       </p:sp>
       <p:sp>
         <p:nvSpPr>
-          <p:cNvPr id="29" name="Rectangle 28"/>
-          <p:cNvSpPr/>
-          <p:nvPr/>
-        </p:nvSpPr>
-        <p:spPr>
-          <a:xfrm>
-            <a:off x="6091275" y="2862813"/>
-            <a:ext cx="9144" cy="1574205"/>
-          </a:xfrm>
-          <a:prstGeom prst="rect">
-            <a:avLst/>
-          </a:prstGeom>
-          <a:solidFill>
-            <a:srgbClr val="D9E2EC"/>
-          </a:solidFill>
-          <a:ln>
-            <a:noFill/>
-          </a:ln>
-          <a:effectLst/>
-        </p:spPr>
-        <p:txBody>
-          <a:bodyPr rtlCol="0" anchor="ctr"/>
-          <a:lstStyle/>
-          <a:p>
-            <a:pPr algn="ctr"/>
-          </a:p>
-        </p:txBody>
-      </p:sp>
-      <p:sp>
-        <p:nvSpPr>
-          <p:cNvPr id="30" name="Rectangle 29"/>
+          <p:cNvPr id="28" name="Rectangle 27"/>
           <p:cNvSpPr/>
           <p:nvPr/>
         </p:nvSpPr>
@@ -5049,7 +5008,7 @@
       </p:sp>
       <p:sp>
         <p:nvSpPr>
-          <p:cNvPr id="31" name="TextBox 30"/>
+          <p:cNvPr id="29" name="TextBox 28"/>
           <p:cNvSpPr txBox="1"/>
           <p:nvPr/>
         </p:nvSpPr>
@@ -5183,7 +5142,7 @@
         <p:spPr>
           <a:xfrm>
             <a:off x="502920" y="1335024"/>
-            <a:ext cx="5437479" cy="3108960"/>
+            <a:ext cx="4349983" cy="3108960"/>
           </a:xfrm>
           <a:prstGeom prst="roundRect">
             <a:avLst>
@@ -5217,7 +5176,7 @@
         <p:spPr>
           <a:xfrm>
             <a:off x="667512" y="1490472"/>
-            <a:ext cx="5108295" cy="246450"/>
+            <a:ext cx="4020799" cy="246450"/>
           </a:xfrm>
           <a:prstGeom prst="rect">
             <a:avLst/>
@@ -5256,7 +5215,7 @@
         <p:spPr>
           <a:xfrm>
             <a:off x="667512" y="1846650"/>
-            <a:ext cx="5108295" cy="2441885"/>
+            <a:ext cx="4020799" cy="2441885"/>
           </a:xfrm>
           <a:prstGeom prst="rect">
             <a:avLst/>
@@ -5281,7 +5240,7 @@
                 </a:solidFill>
                 <a:latin typeface="Arial"/>
               </a:rPr>
-              <a:t>• Отметка модели выходит вместе со снимком</a:t>
+              <a:t>• Отметка модели выходит со снимком</a:t>
             </a:r>
           </a:p>
           <a:p>
@@ -5313,7 +5272,7 @@
                 </a:solidFill>
                 <a:latin typeface="Arial"/>
               </a:rPr>
-              <a:t>• Врач работает без помощника, привыкнув к нему</a:t>
+              <a:t>• Работает без помощника, привыкнув к нему</a:t>
             </a:r>
           </a:p>
           <a:p>
@@ -5329,7 +5288,7 @@
                 </a:solidFill>
                 <a:latin typeface="Arial"/>
               </a:rPr>
-              <a:t>• Тревоги идут потоком, врач отклоняет подряд</a:t>
+              <a:t>• Тревоги идут потоком, отклоняет подряд</a:t>
             </a:r>
           </a:p>
           <a:p>
@@ -5361,7 +5320,7 @@
                 </a:solidFill>
                 <a:latin typeface="Arial"/>
               </a:rPr>
-              <a:t>• Врач переписывает машинное заключение</a:t>
+              <a:t>• Переписывает машинное заключение</a:t>
             </a:r>
           </a:p>
         </p:txBody>
@@ -5374,8 +5333,8 @@
         </p:nvSpPr>
         <p:spPr>
           <a:xfrm>
-            <a:off x="6251295" y="1335024"/>
-            <a:ext cx="5437479" cy="3108960"/>
+            <a:off x="5163799" y="1335024"/>
+            <a:ext cx="6524975" cy="3108960"/>
           </a:xfrm>
           <a:prstGeom prst="roundRect">
             <a:avLst>
@@ -5408,8 +5367,8 @@
         </p:nvSpPr>
         <p:spPr>
           <a:xfrm>
-            <a:off x="6415887" y="1490472"/>
-            <a:ext cx="5108295" cy="246450"/>
+            <a:off x="5328391" y="1490472"/>
+            <a:ext cx="6195791" cy="246450"/>
           </a:xfrm>
           <a:prstGeom prst="rect">
             <a:avLst/>
@@ -5447,8 +5406,8 @@
         </p:nvSpPr>
         <p:spPr>
           <a:xfrm>
-            <a:off x="6415887" y="1846650"/>
-            <a:ext cx="5108295" cy="2441885"/>
+            <a:off x="5328391" y="1846650"/>
+            <a:ext cx="6195791" cy="2441885"/>
           </a:xfrm>
           <a:prstGeom prst="rect">
             <a:avLst/>
@@ -5489,7 +5448,7 @@
                 </a:solidFill>
                 <a:latin typeface="Arial"/>
               </a:rPr>
-              <a:t>• Пропущенных раков 61 против 29 из ста. 10 врачей</a:t>
+              <a:t>• Пропущенных раков 61 против 29 из ста. Те же 10 врачей</a:t>
             </a:r>
           </a:p>
           <a:p>
@@ -5521,7 +5480,7 @@
                 </a:solidFill>
                 <a:latin typeface="Arial"/>
               </a:rPr>
-              <a:t>• Отклоняется 90 из ста; уместны 0,5 из ста</a:t>
+              <a:t>• Отклоняется 90 тревог из ста; уместны 0,5 из ста</a:t>
             </a:r>
           </a:p>
           <a:p>
@@ -5553,7 +5512,7 @@
                 </a:solidFill>
                 <a:latin typeface="Arial"/>
               </a:rPr>
-              <a:t>• Правится 31 из ста. 159 630 кардиограмм</a:t>
+              <a:t>• Правится 31 заключение из ста. 159 630 кардиограмм</a:t>
             </a:r>
           </a:p>
         </p:txBody>
@@ -5567,11 +5526,11 @@
         <p:spPr>
           <a:xfrm>
             <a:off x="374904" y="4535424"/>
-            <a:ext cx="11441887" cy="957342"/>
+            <a:ext cx="11441887" cy="1700784"/>
           </a:xfrm>
           <a:prstGeom prst="roundRect">
             <a:avLst>
-              <a:gd name="adj" fmla="val 25000"/>
+              <a:gd name="adj" fmla="val 17921"/>
             </a:avLst>
           </a:prstGeom>
           <a:solidFill>
@@ -5616,11 +5575,11 @@
           <a:p>
             <a:pPr algn="l">
               <a:lnSpc>
-                <a:spcPct val="126000"/>
+                <a:spcPct val="118000"/>
               </a:lnSpc>
             </a:pPr>
             <a:r>
-              <a:rPr sz="1500" b="1" i="0">
+              <a:rPr sz="1400" b="1" i="0">
                 <a:solidFill>
                   <a:srgbClr val="21295C"/>
                 </a:solidFill>
@@ -5632,14 +5591,14 @@
           <a:p>
             <a:pPr algn="l">
               <a:lnSpc>
-                <a:spcPct val="126000"/>
+                <a:spcPct val="118000"/>
               </a:lnSpc>
               <a:spcBef>
-                <a:spcPts val="700"/>
+                <a:spcPts val="600"/>
               </a:spcBef>
             </a:pPr>
             <a:r>
-              <a:rPr sz="1500" b="0" i="0">
+              <a:rPr sz="1400" b="0" i="0">
                 <a:solidFill>
                   <a:srgbClr val="21295C"/>
                 </a:solidFill>
@@ -5648,7 +5607,7 @@
               <a:t/>
             </a:r>
             <a:r>
-              <a:rPr sz="1500" b="1" i="0">
+              <a:rPr sz="1400" b="1" i="0">
                 <a:solidFill>
                   <a:srgbClr val="21295C"/>
                 </a:solidFill>
@@ -5844,7 +5803,7 @@
         <p:spPr>
           <a:xfrm>
             <a:off x="502920" y="1335024"/>
-            <a:ext cx="5437479" cy="3108960"/>
+            <a:ext cx="4349983" cy="3108960"/>
           </a:xfrm>
           <a:prstGeom prst="roundRect">
             <a:avLst>
@@ -5878,7 +5837,7 @@
         <p:spPr>
           <a:xfrm>
             <a:off x="667512" y="1490472"/>
-            <a:ext cx="5108295" cy="246450"/>
+            <a:ext cx="4020799" cy="246450"/>
           </a:xfrm>
           <a:prstGeom prst="rect">
             <a:avLst/>
@@ -5917,7 +5876,7 @@
         <p:spPr>
           <a:xfrm>
             <a:off x="667512" y="1846650"/>
-            <a:ext cx="5108295" cy="2441885"/>
+            <a:ext cx="4020799" cy="2441885"/>
           </a:xfrm>
           <a:prstGeom prst="rect">
             <a:avLst/>
@@ -5942,7 +5901,7 @@
                 </a:solidFill>
                 <a:latin typeface="Arial"/>
               </a:rPr>
-              <a:t>• Пациенту говорят, что врач пользуется моделью</a:t>
+              <a:t>• Пациенту сказали про модель</a:t>
             </a:r>
           </a:p>
           <a:p>
@@ -5958,7 +5917,7 @@
                 </a:solidFill>
                 <a:latin typeface="Arial"/>
               </a:rPr>
-              <a:t>• Модель предлагают единственным читателем снимка</a:t>
+              <a:t>• Модель — единственный читатель</a:t>
             </a:r>
           </a:p>
           <a:p>
@@ -5974,7 +5933,7 @@
                 </a:solidFill>
                 <a:latin typeface="Arial"/>
               </a:rPr>
-              <a:t>• Тревогу по снимку подняла модель</a:t>
+              <a:t>• Тревогу подняла модель</a:t>
             </a:r>
           </a:p>
           <a:p>
@@ -5990,7 +5949,7 @@
                 </a:solidFill>
                 <a:latin typeface="Arial"/>
               </a:rPr>
-              <a:t>• Осмотр моделью предлагают без доплаты</a:t>
+              <a:t>• Осмотр моделью без доплаты</a:t>
             </a:r>
           </a:p>
           <a:p>
@@ -6006,7 +5965,7 @@
                 </a:solidFill>
                 <a:latin typeface="Arial"/>
               </a:rPr>
-              <a:t>• Пациент читает ответ, не зная, кто его написал</a:t>
+              <a:t>• Автор ответа не назван</a:t>
             </a:r>
           </a:p>
         </p:txBody>
@@ -6019,8 +5978,8 @@
         </p:nvSpPr>
         <p:spPr>
           <a:xfrm>
-            <a:off x="6251295" y="1335024"/>
-            <a:ext cx="5437479" cy="3108960"/>
+            <a:off x="5163799" y="1335024"/>
+            <a:ext cx="6524975" cy="3108960"/>
           </a:xfrm>
           <a:prstGeom prst="roundRect">
             <a:avLst>
@@ -6053,8 +6012,8 @@
         </p:nvSpPr>
         <p:spPr>
           <a:xfrm>
-            <a:off x="6415887" y="1490472"/>
-            <a:ext cx="5108295" cy="246450"/>
+            <a:off x="5328391" y="1490472"/>
+            <a:ext cx="6195791" cy="246450"/>
           </a:xfrm>
           <a:prstGeom prst="rect">
             <a:avLst/>
@@ -6092,8 +6051,8 @@
         </p:nvSpPr>
         <p:spPr>
           <a:xfrm>
-            <a:off x="6415887" y="1846650"/>
-            <a:ext cx="5108295" cy="2441885"/>
+            <a:off x="5328391" y="1846650"/>
+            <a:ext cx="6195791" cy="2441885"/>
           </a:xfrm>
           <a:prstGeom prst="rect">
             <a:avLst/>
@@ -6118,7 +6077,7 @@
                 </a:solidFill>
                 <a:latin typeface="Arial"/>
               </a:rPr>
-              <a:t>• Доверие 0,30 против 0,63 из единицы. 1 762 взрослых</a:t>
+              <a:t>• Доверие к врачу 0,30 против 0,63 из единицы. 1 762 взрослых</a:t>
             </a:r>
           </a:p>
           <a:p>
@@ -6134,7 +6093,7 @@
                 </a:solidFill>
                 <a:latin typeface="Arial"/>
               </a:rPr>
-              <a:t>• Соглашаются 23 из 518; вторым читателем — 368</a:t>
+              <a:t>• Соглашаются 23 из 518; вторым читателем — 368 из тех же 518</a:t>
             </a:r>
           </a:p>
           <a:p>
@@ -6150,7 +6109,7 @@
                 </a:solidFill>
                 <a:latin typeface="Arial"/>
               </a:rPr>
-              <a:t>• Врача просят 319 из 359; наоборот — 184</a:t>
+              <a:t>• Врача просят посмотреть 319 из 359; наоборот — 184</a:t>
             </a:r>
           </a:p>
           <a:p>
@@ -6166,7 +6125,7 @@
                 </a:solidFill>
                 <a:latin typeface="Arial"/>
               </a:rPr>
-              <a:t>• Выбирают 81 против 43 из ста. 248 взрослых</a:t>
+              <a:t>• Без доплаты выбирают 81 из ста, с доплатой — 43. 248 взрослых</a:t>
             </a:r>
           </a:p>
           <a:p>
@@ -6182,7 +6141,7 @@
                 </a:solidFill>
                 <a:latin typeface="Arial"/>
               </a:rPr>
-              <a:t>• Сочувствие 4,11 против 2,01 из пяти. 45 человек</a:t>
+              <a:t>• Сочувствие машины 4,11 против 2,01 из пяти. 45 человек</a:t>
             </a:r>
           </a:p>
         </p:txBody>
@@ -6196,11 +6155,11 @@
         <p:spPr>
           <a:xfrm>
             <a:off x="374904" y="4535424"/>
-            <a:ext cx="11441887" cy="957342"/>
+            <a:ext cx="11441887" cy="1700784"/>
           </a:xfrm>
           <a:prstGeom prst="roundRect">
             <a:avLst>
-              <a:gd name="adj" fmla="val 25000"/>
+              <a:gd name="adj" fmla="val 17921"/>
             </a:avLst>
           </a:prstGeom>
           <a:solidFill>
@@ -6245,11 +6204,11 @@
           <a:p>
             <a:pPr algn="l">
               <a:lnSpc>
-                <a:spcPct val="126000"/>
+                <a:spcPct val="118000"/>
               </a:lnSpc>
             </a:pPr>
             <a:r>
-              <a:rPr sz="1500" b="1" i="0">
+              <a:rPr sz="1400" b="1" i="0">
                 <a:solidFill>
                   <a:srgbClr val="21295C"/>
                 </a:solidFill>
@@ -6261,14 +6220,14 @@
           <a:p>
             <a:pPr algn="l">
               <a:lnSpc>
-                <a:spcPct val="126000"/>
+                <a:spcPct val="118000"/>
               </a:lnSpc>
               <a:spcBef>
-                <a:spcPts val="700"/>
+                <a:spcPts val="600"/>
               </a:spcBef>
             </a:pPr>
             <a:r>
-              <a:rPr sz="1500" b="0" i="0">
+              <a:rPr sz="1400" b="0" i="0">
                 <a:solidFill>
                   <a:srgbClr val="21295C"/>
                 </a:solidFill>
@@ -6277,7 +6236,7 @@
               <a:t/>
             </a:r>
             <a:r>
-              <a:rPr sz="1500" b="1" i="0">
+              <a:rPr sz="1400" b="1" i="0">
                 <a:solidFill>
                   <a:srgbClr val="21295C"/>
                 </a:solidFill>

--- a/library/lectures/lec-07/rework/deck/tri-kadra-o-cheloveke.pptx
+++ b/library/lectures/lec-07/rework/deck/tri-kadra-o-cheloveke.pptx
@@ -5480,7 +5480,7 @@
                 </a:solidFill>
                 <a:latin typeface="Arial"/>
               </a:rPr>
-              <a:t>• Отклоняется 90 тревог из ста; уместны 0,5 из ста</a:t>
+              <a:t>• Отклоняется 90 из ста; при высшей тяжести уместны 0,5 из ста</a:t>
             </a:r>
           </a:p>
           <a:p>

--- a/library/lectures/lec-07/rework/deck/tri-kadra-o-cheloveke.pptx
+++ b/library/lectures/lec-07/rework/deck/tri-kadra-o-cheloveke.pptx
@@ -3989,13 +3989,207 @@
       </p:sp>
       <p:sp>
         <p:nvSpPr>
-          <p:cNvPr id="4" name="TextBox 3"/>
+          <p:cNvPr id="4" name="Rounded Rectangle 3"/>
+          <p:cNvSpPr/>
+          <p:nvPr/>
+        </p:nvSpPr>
+        <p:spPr>
+          <a:xfrm>
+            <a:off x="1743747" y="1335024"/>
+            <a:ext cx="3019832" cy="2651760"/>
+          </a:xfrm>
+          <a:prstGeom prst="roundRect">
+            <a:avLst>
+              <a:gd name="adj" fmla="val 11494"/>
+            </a:avLst>
+          </a:prstGeom>
+          <a:solidFill>
+            <a:srgbClr val="FFFFFF"/>
+          </a:solidFill>
+          <a:ln w="19050">
+            <a:solidFill>
+              <a:srgbClr val="1C7293"/>
+            </a:solidFill>
+          </a:ln>
+          <a:effectLst/>
+        </p:spPr>
+        <p:txBody>
+          <a:bodyPr rtlCol="0" anchor="ctr"/>
+          <a:lstStyle/>
+          <a:p>
+            <a:pPr algn="ctr"/>
+          </a:p>
+        </p:txBody>
+      </p:sp>
+      <p:pic>
+        <p:nvPicPr>
+          <p:cNvPr id="5" name="Picture 4" descr="s35-vrach-chitaet-s-ekrana.jpg"/>
+          <p:cNvPicPr>
+            <a:picLocks noChangeAspect="1"/>
+          </p:cNvPicPr>
+          <p:nvPr/>
+        </p:nvPicPr>
+        <p:blipFill>
+          <a:blip r:embed="rId2"/>
+          <a:stretch>
+            <a:fillRect/>
+          </a:stretch>
+        </p:blipFill>
+        <p:spPr>
+          <a:xfrm>
+            <a:off x="1908339" y="1499616"/>
+            <a:ext cx="2690648" cy="1901952"/>
+          </a:xfrm>
+          <a:prstGeom prst="rect">
+            <a:avLst/>
+          </a:prstGeom>
+        </p:spPr>
+      </p:pic>
+      <p:sp>
+        <p:nvSpPr>
+          <p:cNvPr id="6" name="TextBox 5"/>
           <p:cNvSpPr txBox="1"/>
           <p:nvPr/>
         </p:nvSpPr>
         <p:spPr>
           <a:xfrm>
-            <a:off x="502920" y="1371600"/>
+            <a:off x="1908339" y="3419856"/>
+            <a:ext cx="2690648" cy="420623"/>
+          </a:xfrm>
+          <a:prstGeom prst="rect">
+            <a:avLst/>
+          </a:prstGeom>
+          <a:noFill/>
+        </p:spPr>
+        <p:txBody>
+          <a:bodyPr wrap="square" lIns="0" rIns="0" tIns="0" bIns="0" anchor="t">
+            <a:spAutoFit/>
+          </a:bodyPr>
+          <a:lstStyle/>
+          <a:p>
+            <a:pPr algn="ctr">
+              <a:lnSpc>
+                <a:spcPct val="112000"/>
+              </a:lnSpc>
+            </a:pPr>
+            <a:r>
+              <a:rPr sz="1200" b="0" i="1">
+                <a:solidFill>
+                  <a:srgbClr val="1C7293"/>
+                </a:solidFill>
+                <a:latin typeface="Arial"/>
+              </a:rPr>
+              <a:t>Врач</a:t>
+            </a:r>
+          </a:p>
+        </p:txBody>
+      </p:sp>
+      <p:sp>
+        <p:nvSpPr>
+          <p:cNvPr id="7" name="Rounded Rectangle 6"/>
+          <p:cNvSpPr/>
+          <p:nvPr/>
+        </p:nvSpPr>
+        <p:spPr>
+          <a:xfrm>
+            <a:off x="7427916" y="1335024"/>
+            <a:ext cx="3020228" cy="2651760"/>
+          </a:xfrm>
+          <a:prstGeom prst="roundRect">
+            <a:avLst>
+              <a:gd name="adj" fmla="val 11494"/>
+            </a:avLst>
+          </a:prstGeom>
+          <a:solidFill>
+            <a:srgbClr val="FFFFFF"/>
+          </a:solidFill>
+          <a:ln w="19050">
+            <a:solidFill>
+              <a:srgbClr val="1C7293"/>
+            </a:solidFill>
+          </a:ln>
+          <a:effectLst/>
+        </p:spPr>
+        <p:txBody>
+          <a:bodyPr rtlCol="0" anchor="ctr"/>
+          <a:lstStyle/>
+          <a:p>
+            <a:pPr algn="ctr"/>
+          </a:p>
+        </p:txBody>
+      </p:sp>
+      <p:pic>
+        <p:nvPicPr>
+          <p:cNvPr id="8" name="Picture 7" descr="dve-storony-pacient-landscape.jpg"/>
+          <p:cNvPicPr>
+            <a:picLocks noChangeAspect="1"/>
+          </p:cNvPicPr>
+          <p:nvPr/>
+        </p:nvPicPr>
+        <p:blipFill>
+          <a:blip r:embed="rId3"/>
+          <a:stretch>
+            <a:fillRect/>
+          </a:stretch>
+        </p:blipFill>
+        <p:spPr>
+          <a:xfrm>
+            <a:off x="7592508" y="1499616"/>
+            <a:ext cx="2691044" cy="1901952"/>
+          </a:xfrm>
+          <a:prstGeom prst="rect">
+            <a:avLst/>
+          </a:prstGeom>
+        </p:spPr>
+      </p:pic>
+      <p:sp>
+        <p:nvSpPr>
+          <p:cNvPr id="9" name="TextBox 8"/>
+          <p:cNvSpPr txBox="1"/>
+          <p:nvPr/>
+        </p:nvSpPr>
+        <p:spPr>
+          <a:xfrm>
+            <a:off x="7592508" y="3419856"/>
+            <a:ext cx="2691044" cy="420623"/>
+          </a:xfrm>
+          <a:prstGeom prst="rect">
+            <a:avLst/>
+          </a:prstGeom>
+          <a:noFill/>
+        </p:spPr>
+        <p:txBody>
+          <a:bodyPr wrap="square" lIns="0" rIns="0" tIns="0" bIns="0" anchor="t">
+            <a:spAutoFit/>
+          </a:bodyPr>
+          <a:lstStyle/>
+          <a:p>
+            <a:pPr algn="ctr">
+              <a:lnSpc>
+                <a:spcPct val="112000"/>
+              </a:lnSpc>
+            </a:pPr>
+            <a:r>
+              <a:rPr sz="1200" b="0" i="1">
+                <a:solidFill>
+                  <a:srgbClr val="1C7293"/>
+                </a:solidFill>
+                <a:latin typeface="Arial"/>
+              </a:rPr>
+              <a:t>Пациент</a:t>
+            </a:r>
+          </a:p>
+        </p:txBody>
+      </p:sp>
+      <p:sp>
+        <p:nvSpPr>
+          <p:cNvPr id="10" name="TextBox 9"/>
+          <p:cNvSpPr txBox="1"/>
+          <p:nvPr/>
+        </p:nvSpPr>
+        <p:spPr>
+          <a:xfrm>
+            <a:off x="502920" y="4206240"/>
             <a:ext cx="1307592" cy="402240"/>
           </a:xfrm>
           <a:prstGeom prst="rect">
@@ -4028,13 +4222,13 @@
       </p:sp>
       <p:sp>
         <p:nvSpPr>
-          <p:cNvPr id="5" name="Rounded Rectangle 4"/>
+          <p:cNvPr id="11" name="Rounded Rectangle 10"/>
           <p:cNvSpPr/>
           <p:nvPr/>
         </p:nvSpPr>
         <p:spPr>
           <a:xfrm>
-            <a:off x="1920240" y="1335024"/>
+            <a:off x="1920240" y="4169664"/>
             <a:ext cx="3073298" cy="475392"/>
           </a:xfrm>
           <a:prstGeom prst="roundRect">
@@ -4062,13 +4256,13 @@
       </p:sp>
       <p:sp>
         <p:nvSpPr>
-          <p:cNvPr id="6" name="TextBox 5"/>
+          <p:cNvPr id="12" name="TextBox 11"/>
           <p:cNvSpPr txBox="1"/>
           <p:nvPr/>
         </p:nvSpPr>
         <p:spPr>
           <a:xfrm>
-            <a:off x="2002536" y="1380744"/>
+            <a:off x="2002536" y="4215384"/>
             <a:ext cx="2908706" cy="383952"/>
           </a:xfrm>
           <a:prstGeom prst="rect">
@@ -4101,13 +4295,13 @@
       </p:sp>
       <p:sp>
         <p:nvSpPr>
-          <p:cNvPr id="7" name="Right Arrow 6"/>
+          <p:cNvPr id="13" name="Right Arrow 12"/>
           <p:cNvSpPr/>
           <p:nvPr/>
         </p:nvSpPr>
         <p:spPr>
           <a:xfrm>
-            <a:off x="5039258" y="1504140"/>
+            <a:off x="5039258" y="4338780"/>
             <a:ext cx="182880" cy="137160"/>
           </a:xfrm>
           <a:prstGeom prst="rightArrow">
@@ -4131,13 +4325,13 @@
       </p:sp>
       <p:sp>
         <p:nvSpPr>
-          <p:cNvPr id="8" name="Rounded Rectangle 7"/>
+          <p:cNvPr id="14" name="Rounded Rectangle 13"/>
           <p:cNvSpPr/>
           <p:nvPr/>
         </p:nvSpPr>
         <p:spPr>
           <a:xfrm>
-            <a:off x="5267858" y="1335024"/>
+            <a:off x="5267858" y="4169664"/>
             <a:ext cx="3073298" cy="475392"/>
           </a:xfrm>
           <a:prstGeom prst="roundRect">
@@ -4165,13 +4359,13 @@
       </p:sp>
       <p:sp>
         <p:nvSpPr>
-          <p:cNvPr id="9" name="TextBox 8"/>
+          <p:cNvPr id="15" name="TextBox 14"/>
           <p:cNvSpPr txBox="1"/>
           <p:nvPr/>
         </p:nvSpPr>
         <p:spPr>
           <a:xfrm>
-            <a:off x="5350154" y="1380744"/>
+            <a:off x="5350154" y="4215384"/>
             <a:ext cx="2908706" cy="383952"/>
           </a:xfrm>
           <a:prstGeom prst="rect">
@@ -4204,13 +4398,13 @@
       </p:sp>
       <p:sp>
         <p:nvSpPr>
-          <p:cNvPr id="10" name="Right Arrow 9"/>
+          <p:cNvPr id="16" name="Right Arrow 15"/>
           <p:cNvSpPr/>
           <p:nvPr/>
         </p:nvSpPr>
         <p:spPr>
           <a:xfrm>
-            <a:off x="8386876" y="1504140"/>
+            <a:off x="8386876" y="4338780"/>
             <a:ext cx="182880" cy="137160"/>
           </a:xfrm>
           <a:prstGeom prst="rightArrow">
@@ -4234,13 +4428,13 @@
       </p:sp>
       <p:sp>
         <p:nvSpPr>
-          <p:cNvPr id="11" name="Rounded Rectangle 10"/>
+          <p:cNvPr id="17" name="Rounded Rectangle 16"/>
           <p:cNvSpPr/>
           <p:nvPr/>
         </p:nvSpPr>
         <p:spPr>
           <a:xfrm>
-            <a:off x="8615476" y="1335024"/>
+            <a:off x="8615476" y="4169664"/>
             <a:ext cx="3073298" cy="475392"/>
           </a:xfrm>
           <a:prstGeom prst="roundRect">
@@ -4268,13 +4462,13 @@
       </p:sp>
       <p:sp>
         <p:nvSpPr>
-          <p:cNvPr id="12" name="TextBox 11"/>
+          <p:cNvPr id="18" name="TextBox 17"/>
           <p:cNvSpPr txBox="1"/>
           <p:nvPr/>
         </p:nvSpPr>
         <p:spPr>
           <a:xfrm>
-            <a:off x="8697772" y="1380744"/>
+            <a:off x="8697772" y="4215384"/>
             <a:ext cx="2908706" cy="383952"/>
           </a:xfrm>
           <a:prstGeom prst="rect">
@@ -4307,13 +4501,13 @@
       </p:sp>
       <p:sp>
         <p:nvSpPr>
-          <p:cNvPr id="13" name="TextBox 12"/>
+          <p:cNvPr id="19" name="TextBox 18"/>
           <p:cNvSpPr txBox="1"/>
           <p:nvPr/>
         </p:nvSpPr>
         <p:spPr>
           <a:xfrm>
-            <a:off x="502920" y="1993296"/>
+            <a:off x="502920" y="4827936"/>
             <a:ext cx="1307592" cy="402240"/>
           </a:xfrm>
           <a:prstGeom prst="rect">
@@ -4346,13 +4540,13 @@
       </p:sp>
       <p:sp>
         <p:nvSpPr>
-          <p:cNvPr id="14" name="Rounded Rectangle 13"/>
+          <p:cNvPr id="20" name="Rounded Rectangle 19"/>
           <p:cNvSpPr/>
           <p:nvPr/>
         </p:nvSpPr>
         <p:spPr>
           <a:xfrm>
-            <a:off x="1920240" y="1956720"/>
+            <a:off x="1920240" y="4791360"/>
             <a:ext cx="2236393" cy="475392"/>
           </a:xfrm>
           <a:prstGeom prst="roundRect">
@@ -4380,13 +4574,13 @@
       </p:sp>
       <p:sp>
         <p:nvSpPr>
-          <p:cNvPr id="15" name="TextBox 14"/>
+          <p:cNvPr id="21" name="TextBox 20"/>
           <p:cNvSpPr txBox="1"/>
           <p:nvPr/>
         </p:nvSpPr>
         <p:spPr>
           <a:xfrm>
-            <a:off x="2002536" y="2002440"/>
+            <a:off x="2002536" y="4837080"/>
             <a:ext cx="2071801" cy="383952"/>
           </a:xfrm>
           <a:prstGeom prst="rect">
@@ -4419,13 +4613,13 @@
       </p:sp>
       <p:sp>
         <p:nvSpPr>
-          <p:cNvPr id="16" name="Right Arrow 15"/>
+          <p:cNvPr id="22" name="Right Arrow 21"/>
           <p:cNvSpPr/>
           <p:nvPr/>
         </p:nvSpPr>
         <p:spPr>
           <a:xfrm>
-            <a:off x="4202353" y="2125837"/>
+            <a:off x="4202353" y="4960477"/>
             <a:ext cx="182880" cy="137160"/>
           </a:xfrm>
           <a:prstGeom prst="rightArrow">
@@ -4449,13 +4643,13 @@
       </p:sp>
       <p:sp>
         <p:nvSpPr>
-          <p:cNvPr id="17" name="Rounded Rectangle 16"/>
+          <p:cNvPr id="23" name="Rounded Rectangle 22"/>
           <p:cNvSpPr/>
           <p:nvPr/>
         </p:nvSpPr>
         <p:spPr>
           <a:xfrm>
-            <a:off x="4430953" y="1956720"/>
+            <a:off x="4430953" y="4791360"/>
             <a:ext cx="2236393" cy="475392"/>
           </a:xfrm>
           <a:prstGeom prst="roundRect">
@@ -4483,13 +4677,13 @@
       </p:sp>
       <p:sp>
         <p:nvSpPr>
-          <p:cNvPr id="18" name="TextBox 17"/>
+          <p:cNvPr id="24" name="TextBox 23"/>
           <p:cNvSpPr txBox="1"/>
           <p:nvPr/>
         </p:nvSpPr>
         <p:spPr>
           <a:xfrm>
-            <a:off x="4513249" y="2002440"/>
+            <a:off x="4513249" y="4837080"/>
             <a:ext cx="2071801" cy="383952"/>
           </a:xfrm>
           <a:prstGeom prst="rect">
@@ -4522,13 +4716,13 @@
       </p:sp>
       <p:sp>
         <p:nvSpPr>
-          <p:cNvPr id="19" name="Right Arrow 18"/>
+          <p:cNvPr id="25" name="Right Arrow 24"/>
           <p:cNvSpPr/>
           <p:nvPr/>
         </p:nvSpPr>
         <p:spPr>
           <a:xfrm>
-            <a:off x="6713067" y="2125837"/>
+            <a:off x="6713067" y="4960477"/>
             <a:ext cx="182880" cy="137160"/>
           </a:xfrm>
           <a:prstGeom prst="rightArrow">
@@ -4552,13 +4746,13 @@
       </p:sp>
       <p:sp>
         <p:nvSpPr>
-          <p:cNvPr id="20" name="Rounded Rectangle 19"/>
+          <p:cNvPr id="26" name="Rounded Rectangle 25"/>
           <p:cNvSpPr/>
           <p:nvPr/>
         </p:nvSpPr>
         <p:spPr>
           <a:xfrm>
-            <a:off x="6941667" y="1956720"/>
+            <a:off x="6941667" y="4791360"/>
             <a:ext cx="2236393" cy="475392"/>
           </a:xfrm>
           <a:prstGeom prst="roundRect">
@@ -4586,13 +4780,13 @@
       </p:sp>
       <p:sp>
         <p:nvSpPr>
-          <p:cNvPr id="21" name="TextBox 20"/>
+          <p:cNvPr id="27" name="TextBox 26"/>
           <p:cNvSpPr txBox="1"/>
           <p:nvPr/>
         </p:nvSpPr>
         <p:spPr>
           <a:xfrm>
-            <a:off x="7023963" y="2002440"/>
+            <a:off x="7023963" y="4837080"/>
             <a:ext cx="2071801" cy="383952"/>
           </a:xfrm>
           <a:prstGeom prst="rect">
@@ -4625,13 +4819,13 @@
       </p:sp>
       <p:sp>
         <p:nvSpPr>
-          <p:cNvPr id="22" name="Right Arrow 21"/>
+          <p:cNvPr id="28" name="Right Arrow 27"/>
           <p:cNvSpPr/>
           <p:nvPr/>
         </p:nvSpPr>
         <p:spPr>
           <a:xfrm>
-            <a:off x="9223781" y="2125837"/>
+            <a:off x="9223781" y="4960477"/>
             <a:ext cx="182880" cy="137160"/>
           </a:xfrm>
           <a:prstGeom prst="rightArrow">
@@ -4655,13 +4849,13 @@
       </p:sp>
       <p:sp>
         <p:nvSpPr>
-          <p:cNvPr id="23" name="Rounded Rectangle 22"/>
+          <p:cNvPr id="29" name="Rounded Rectangle 28"/>
           <p:cNvSpPr/>
           <p:nvPr/>
         </p:nvSpPr>
         <p:spPr>
           <a:xfrm>
-            <a:off x="9452381" y="1956720"/>
+            <a:off x="9452381" y="4791360"/>
             <a:ext cx="2236393" cy="475392"/>
           </a:xfrm>
           <a:prstGeom prst="roundRect">
@@ -4689,13 +4883,13 @@
       </p:sp>
       <p:sp>
         <p:nvSpPr>
-          <p:cNvPr id="24" name="TextBox 23"/>
+          <p:cNvPr id="30" name="TextBox 29"/>
           <p:cNvSpPr txBox="1"/>
           <p:nvPr/>
         </p:nvSpPr>
         <p:spPr>
           <a:xfrm>
-            <a:off x="9534677" y="2002440"/>
+            <a:off x="9534677" y="4837080"/>
             <a:ext cx="2071801" cy="383952"/>
           </a:xfrm>
           <a:prstGeom prst="rect">
@@ -4728,13 +4922,13 @@
       </p:sp>
       <p:sp>
         <p:nvSpPr>
-          <p:cNvPr id="25" name="TextBox 24"/>
+          <p:cNvPr id="31" name="TextBox 30"/>
           <p:cNvSpPr txBox="1"/>
           <p:nvPr/>
         </p:nvSpPr>
         <p:spPr>
           <a:xfrm>
-            <a:off x="502920" y="2468689"/>
+            <a:off x="502920" y="5303329"/>
             <a:ext cx="11185855" cy="211243"/>
           </a:xfrm>
           <a:prstGeom prst="rect">
@@ -4767,18 +4961,18 @@
       </p:sp>
       <p:sp>
         <p:nvSpPr>
-          <p:cNvPr id="26" name="Rounded Rectangle 25"/>
+          <p:cNvPr id="32" name="Rounded Rectangle 31"/>
           <p:cNvSpPr/>
           <p:nvPr/>
         </p:nvSpPr>
         <p:spPr>
           <a:xfrm>
-            <a:off x="374904" y="2771373"/>
-            <a:ext cx="11441887" cy="3464834"/>
+            <a:off x="374904" y="5606013"/>
+            <a:ext cx="11441887" cy="579009"/>
           </a:xfrm>
           <a:prstGeom prst="roundRect">
             <a:avLst>
-              <a:gd name="adj" fmla="val 8796"/>
+              <a:gd name="adj" fmla="val 25000"/>
             </a:avLst>
           </a:prstGeom>
           <a:solidFill>
@@ -4801,14 +4995,14 @@
       </p:sp>
       <p:sp>
         <p:nvSpPr>
-          <p:cNvPr id="27" name="TextBox 26"/>
+          <p:cNvPr id="33" name="TextBox 32"/>
           <p:cNvSpPr txBox="1"/>
           <p:nvPr/>
         </p:nvSpPr>
         <p:spPr>
           <a:xfrm>
-            <a:off x="539496" y="2862813"/>
-            <a:ext cx="11112703" cy="3373394"/>
+            <a:off x="539496" y="5697453"/>
+            <a:ext cx="11112703" cy="538754"/>
           </a:xfrm>
           <a:prstGeom prst="rect">
             <a:avLst/>
@@ -4833,152 +5027,14 @@
                 </a:solidFill>
                 <a:latin typeface="Arial"/>
               </a:rPr>
-              <a:t>У приёма две стороны, и замеры у них разные.</a:t>
-            </a:r>
-          </a:p>
-          <a:p>
-            <a:pPr algn="l">
-              <a:lnSpc>
-                <a:spcPct val="118000"/>
-              </a:lnSpc>
-              <a:spcBef>
-                <a:spcPts val="600"/>
-              </a:spcBef>
-            </a:pPr>
-            <a:r>
-              <a:rPr sz="1400" b="0" i="0">
-                <a:solidFill>
-                  <a:srgbClr val="21295C"/>
-                </a:solidFill>
-                <a:latin typeface="Arial"/>
-              </a:rPr>
-              <a:t/>
-            </a:r>
-            <a:r>
-              <a:rPr sz="1400" b="1" i="0">
-                <a:solidFill>
-                  <a:srgbClr val="21295C"/>
-                </a:solidFill>
-                <a:latin typeface="Arial"/>
-              </a:rPr>
-              <a:t>Со стороны врача</a:t>
-            </a:r>
-            <a:r>
-              <a:rPr sz="1400" b="0" i="0">
-                <a:solidFill>
-                  <a:srgbClr val="21295C"/>
-                </a:solidFill>
-                <a:latin typeface="Arial"/>
-              </a:rPr>
-              <a:t> меняется то, </a:t>
-            </a:r>
-            <a:r>
-              <a:rPr sz="1400" b="1" i="0">
-                <a:solidFill>
-                  <a:srgbClr val="21295C"/>
-                </a:solidFill>
-                <a:latin typeface="Arial"/>
-              </a:rPr>
-              <a:t>как он принимает решение</a:t>
-            </a:r>
-            <a:r>
-              <a:rPr sz="1400" b="0" i="0">
-                <a:solidFill>
-                  <a:srgbClr val="21295C"/>
-                </a:solidFill>
-                <a:latin typeface="Arial"/>
-              </a:rPr>
-              <a:t>: на что смотрит, чему верит, что умеет без помощника.</a:t>
-            </a:r>
-          </a:p>
-          <a:p>
-            <a:pPr algn="l">
-              <a:lnSpc>
-                <a:spcPct val="118000"/>
-              </a:lnSpc>
-              <a:spcBef>
-                <a:spcPts val="600"/>
-              </a:spcBef>
-            </a:pPr>
-            <a:r>
-              <a:rPr sz="1400" b="0" i="0">
-                <a:solidFill>
-                  <a:srgbClr val="21295C"/>
-                </a:solidFill>
-                <a:latin typeface="Arial"/>
-              </a:rPr>
-              <a:t/>
-            </a:r>
-            <a:r>
-              <a:rPr sz="1400" b="1" i="0">
-                <a:solidFill>
-                  <a:srgbClr val="21295C"/>
-                </a:solidFill>
-                <a:latin typeface="Arial"/>
-              </a:rPr>
-              <a:t>Со стороны пациента</a:t>
-            </a:r>
-            <a:r>
-              <a:rPr sz="1400" b="0" i="0">
-                <a:solidFill>
-                  <a:srgbClr val="21295C"/>
-                </a:solidFill>
-                <a:latin typeface="Arial"/>
-              </a:rPr>
-              <a:t> меняется то, </a:t>
-            </a:r>
-            <a:r>
-              <a:rPr sz="1400" b="1" i="0">
-                <a:solidFill>
-                  <a:srgbClr val="21295C"/>
-                </a:solidFill>
-                <a:latin typeface="Arial"/>
-              </a:rPr>
-              <a:t>согласен ли он с решением</a:t>
-            </a:r>
-            <a:r>
-              <a:rPr sz="1400" b="0" i="0">
-                <a:solidFill>
-                  <a:srgbClr val="21295C"/>
-                </a:solidFill>
-                <a:latin typeface="Arial"/>
-              </a:rPr>
-              <a:t>: кому доверяет, что просит перепроверить, от чего отказывается.</a:t>
-            </a:r>
-          </a:p>
-          <a:p>
-            <a:pPr algn="l">
-              <a:lnSpc>
-                <a:spcPct val="118000"/>
-              </a:lnSpc>
-              <a:spcBef>
-                <a:spcPts val="600"/>
-              </a:spcBef>
-            </a:pPr>
-            <a:r>
-              <a:rPr sz="1400" b="0" i="0">
-                <a:solidFill>
-                  <a:srgbClr val="21295C"/>
-                </a:solidFill>
-                <a:latin typeface="Arial"/>
-              </a:rPr>
-              <a:t/>
-            </a:r>
-            <a:r>
-              <a:rPr sz="1400" b="1" i="0">
-                <a:solidFill>
-                  <a:srgbClr val="21295C"/>
-                </a:solidFill>
-                <a:latin typeface="Arial"/>
-              </a:rPr>
-              <a:t>Дальше разбираем их порознь — потому что порознь они и измерены.</a:t>
-            </a:r>
-          </a:p>
-        </p:txBody>
-      </p:sp>
-      <p:sp>
-        <p:nvSpPr>
-          <p:cNvPr id="28" name="Rectangle 27"/>
+              <a:t>У приёма две стороны, и замеры у них разные — дальше разбираем врача и пациента порознь.</a:t>
+            </a:r>
+          </a:p>
+        </p:txBody>
+      </p:sp>
+      <p:sp>
+        <p:nvSpPr>
+          <p:cNvPr id="34" name="Rectangle 33"/>
           <p:cNvSpPr/>
           <p:nvPr/>
         </p:nvSpPr>
@@ -5008,7 +5064,7 @@
       </p:sp>
       <p:sp>
         <p:nvSpPr>
-          <p:cNvPr id="29" name="TextBox 28"/>
+          <p:cNvPr id="35" name="TextBox 34"/>
           <p:cNvSpPr txBox="1"/>
           <p:nvPr/>
         </p:nvSpPr>
@@ -5039,7 +5095,7 @@
                   <a:srgbClr val="065A82"/>
                 </a:solidFill>
                 <a:latin typeface="Arial"/>
-                <a:hlinkClick r:id="rId2"/>
+                <a:hlinkClick r:id="rId4"/>
               </a:rPr>
               <a:t>Полная запись источников</a:t>
             </a:r>
@@ -5142,11 +5198,11 @@
         <p:spPr>
           <a:xfrm>
             <a:off x="502920" y="1335024"/>
-            <a:ext cx="4349983" cy="3108960"/>
+            <a:ext cx="2020755" cy="3108960"/>
           </a:xfrm>
           <a:prstGeom prst="roundRect">
             <a:avLst>
-              <a:gd name="adj" fmla="val 9803"/>
+              <a:gd name="adj" fmla="val 15083"/>
             </a:avLst>
           </a:prstGeom>
           <a:solidFill>
@@ -5176,7 +5232,7 @@
         <p:spPr>
           <a:xfrm>
             <a:off x="667512" y="1490472"/>
-            <a:ext cx="4020799" cy="246450"/>
+            <a:ext cx="1691571" cy="246450"/>
           </a:xfrm>
           <a:prstGeom prst="rect">
             <a:avLst/>
@@ -5201,7 +5257,7 @@
                 </a:solidFill>
                 <a:latin typeface="Arial"/>
               </a:rPr>
-              <a:t>Как проявляется</a:t>
+              <a:t>Механизм</a:t>
             </a:r>
           </a:p>
         </p:txBody>
@@ -5215,7 +5271,7 @@
         <p:spPr>
           <a:xfrm>
             <a:off x="667512" y="1846650"/>
-            <a:ext cx="4020799" cy="2441885"/>
+            <a:ext cx="1691571" cy="2441885"/>
           </a:xfrm>
           <a:prstGeom prst="rect">
             <a:avLst/>
@@ -5240,7 +5296,7 @@
                 </a:solidFill>
                 <a:latin typeface="Arial"/>
               </a:rPr>
-              <a:t>• Отметка модели выходит со снимком</a:t>
+              <a:t>• Якорение</a:t>
             </a:r>
           </a:p>
           <a:p>
@@ -5256,7 +5312,7 @@
                 </a:solidFill>
                 <a:latin typeface="Arial"/>
               </a:rPr>
-              <a:t>• Глаз реже стоит там, где модель молчит</a:t>
+              <a:t>• Сужение</a:t>
             </a:r>
           </a:p>
           <a:p>
@@ -5272,7 +5328,7 @@
                 </a:solidFill>
                 <a:latin typeface="Arial"/>
               </a:rPr>
-              <a:t>• Работает без помощника, привыкнув к нему</a:t>
+              <a:t>• Износ навыка</a:t>
             </a:r>
           </a:p>
           <a:p>
@@ -5288,7 +5344,7 @@
                 </a:solidFill>
                 <a:latin typeface="Arial"/>
               </a:rPr>
-              <a:t>• Тревоги идут потоком, отклоняет подряд</a:t>
+              <a:t>• Поток тревог</a:t>
             </a:r>
           </a:p>
           <a:p>
@@ -5304,7 +5360,7 @@
                 </a:solidFill>
                 <a:latin typeface="Arial"/>
               </a:rPr>
-              <a:t>• Разбор несогласий — отдельная работа</a:t>
+              <a:t>• Несогласие</a:t>
             </a:r>
           </a:p>
           <a:p>
@@ -5320,7 +5376,7 @@
                 </a:solidFill>
                 <a:latin typeface="Arial"/>
               </a:rPr>
-              <a:t>• Переписывает машинное заключение</a:t>
+              <a:t>• Поправка</a:t>
             </a:r>
           </a:p>
         </p:txBody>
@@ -5333,8 +5389,8 @@
         </p:nvSpPr>
         <p:spPr>
           <a:xfrm>
-            <a:off x="5163799" y="1335024"/>
-            <a:ext cx="6524975" cy="3108960"/>
+            <a:off x="2834571" y="1335024"/>
+            <a:ext cx="3913175" cy="3108960"/>
           </a:xfrm>
           <a:prstGeom prst="roundRect">
             <a:avLst>
@@ -5367,8 +5423,8 @@
         </p:nvSpPr>
         <p:spPr>
           <a:xfrm>
-            <a:off x="5328391" y="1490472"/>
-            <a:ext cx="6195791" cy="246450"/>
+            <a:off x="2999163" y="1490472"/>
+            <a:ext cx="3583991" cy="246450"/>
           </a:xfrm>
           <a:prstGeom prst="rect">
             <a:avLst/>
@@ -5393,7 +5449,7 @@
                 </a:solidFill>
                 <a:latin typeface="Arial"/>
               </a:rPr>
-              <a:t>Последствия</a:t>
+              <a:t>Объяснение</a:t>
             </a:r>
           </a:p>
         </p:txBody>
@@ -5406,8 +5462,8 @@
         </p:nvSpPr>
         <p:spPr>
           <a:xfrm>
-            <a:off x="5328391" y="1846650"/>
-            <a:ext cx="6195791" cy="2441885"/>
+            <a:off x="2999163" y="1846650"/>
+            <a:ext cx="3583991" cy="2441885"/>
           </a:xfrm>
           <a:prstGeom prst="rect">
             <a:avLst/>
@@ -5432,7 +5488,7 @@
                 </a:solidFill>
                 <a:latin typeface="Arial"/>
               </a:rPr>
-              <a:t>• Верных заключений 23,6 против 92,8 из ста. 220 врачей</a:t>
+              <a:t>• Отметка модели выходит со снимком</a:t>
             </a:r>
           </a:p>
           <a:p>
@@ -5448,7 +5504,7 @@
                 </a:solidFill>
                 <a:latin typeface="Arial"/>
               </a:rPr>
-              <a:t>• Пропущенных раков 61 против 29 из ста. Те же 10 врачей</a:t>
+              <a:t>• Глаз реже стоит там, где модель молчит</a:t>
             </a:r>
           </a:p>
           <a:p>
@@ -5464,7 +5520,7 @@
                 </a:solidFill>
                 <a:latin typeface="Arial"/>
               </a:rPr>
-              <a:t>• Находок 22,4 против 28,4 из ста. 1 443 процедуры</a:t>
+              <a:t>• Без помощника находит меньше</a:t>
             </a:r>
           </a:p>
           <a:p>
@@ -5480,7 +5536,7 @@
                 </a:solidFill>
                 <a:latin typeface="Arial"/>
               </a:rPr>
-              <a:t>• Отклоняется 90 из ста; при высшей тяжести уместны 0,5 из ста</a:t>
+              <a:t>• Идут потоком, отклоняет подряд</a:t>
             </a:r>
           </a:p>
           <a:p>
@@ -5496,7 +5552,7 @@
                 </a:solidFill>
                 <a:latin typeface="Arial"/>
               </a:rPr>
-              <a:t>• Разборов 5 283 против 3 449. 50 000 женщин</a:t>
+              <a:t>• Расхождение разбирают отдельно</a:t>
             </a:r>
           </a:p>
           <a:p>
@@ -5512,7 +5568,7 @@
                 </a:solidFill>
                 <a:latin typeface="Arial"/>
               </a:rPr>
-              <a:t>• Правится 31 заключение из ста. 159 630 кардиограмм</a:t>
+              <a:t>• Переписывает машинное заключение</a:t>
             </a:r>
           </a:p>
         </p:txBody>
@@ -5525,12 +5581,204 @@
         </p:nvSpPr>
         <p:spPr>
           <a:xfrm>
-            <a:off x="374904" y="4535424"/>
-            <a:ext cx="11441887" cy="1700784"/>
+            <a:off x="7058643" y="1335024"/>
+            <a:ext cx="4630132" cy="3108960"/>
           </a:xfrm>
           <a:prstGeom prst="roundRect">
             <a:avLst>
-              <a:gd name="adj" fmla="val 17921"/>
+              <a:gd name="adj" fmla="val 9803"/>
+            </a:avLst>
+          </a:prstGeom>
+          <a:solidFill>
+            <a:srgbClr val="FFFFFF"/>
+          </a:solidFill>
+          <a:ln w="19050">
+            <a:solidFill>
+              <a:srgbClr val="028090"/>
+            </a:solidFill>
+          </a:ln>
+          <a:effectLst/>
+        </p:spPr>
+        <p:txBody>
+          <a:bodyPr rtlCol="0" anchor="ctr"/>
+          <a:lstStyle/>
+          <a:p>
+            <a:pPr algn="ctr"/>
+          </a:p>
+        </p:txBody>
+      </p:sp>
+      <p:sp>
+        <p:nvSpPr>
+          <p:cNvPr id="11" name="TextBox 10"/>
+          <p:cNvSpPr txBox="1"/>
+          <p:nvPr/>
+        </p:nvSpPr>
+        <p:spPr>
+          <a:xfrm>
+            <a:off x="7223235" y="1490472"/>
+            <a:ext cx="4300948" cy="246450"/>
+          </a:xfrm>
+          <a:prstGeom prst="rect">
+            <a:avLst/>
+          </a:prstGeom>
+          <a:noFill/>
+        </p:spPr>
+        <p:txBody>
+          <a:bodyPr wrap="square" lIns="0" rIns="0" tIns="0" bIns="0" anchor="t">
+            <a:spAutoFit/>
+          </a:bodyPr>
+          <a:lstStyle/>
+          <a:p>
+            <a:pPr algn="l">
+              <a:lnSpc>
+                <a:spcPct val="112000"/>
+              </a:lnSpc>
+            </a:pPr>
+            <a:r>
+              <a:rPr sz="1400" b="1" i="0">
+                <a:solidFill>
+                  <a:srgbClr val="028090"/>
+                </a:solidFill>
+                <a:latin typeface="Arial"/>
+              </a:rPr>
+              <a:t>Последствия</a:t>
+            </a:r>
+          </a:p>
+        </p:txBody>
+      </p:sp>
+      <p:sp>
+        <p:nvSpPr>
+          <p:cNvPr id="12" name="TextBox 11"/>
+          <p:cNvSpPr txBox="1"/>
+          <p:nvPr/>
+        </p:nvSpPr>
+        <p:spPr>
+          <a:xfrm>
+            <a:off x="7223235" y="1846650"/>
+            <a:ext cx="4300948" cy="2441885"/>
+          </a:xfrm>
+          <a:prstGeom prst="rect">
+            <a:avLst/>
+          </a:prstGeom>
+          <a:noFill/>
+        </p:spPr>
+        <p:txBody>
+          <a:bodyPr wrap="square" lIns="0" rIns="0" tIns="0" bIns="0" anchor="t">
+            <a:spAutoFit/>
+          </a:bodyPr>
+          <a:lstStyle/>
+          <a:p>
+            <a:pPr algn="l">
+              <a:lnSpc>
+                <a:spcPct val="126000"/>
+              </a:lnSpc>
+            </a:pPr>
+            <a:r>
+              <a:rPr sz="1450" b="0" i="0">
+                <a:solidFill>
+                  <a:srgbClr val="21295C"/>
+                </a:solidFill>
+                <a:latin typeface="Arial"/>
+              </a:rPr>
+              <a:t>• 23,6 против 92,8 верных из ста. 220 врачей</a:t>
+            </a:r>
+          </a:p>
+          <a:p>
+            <a:pPr algn="l">
+              <a:lnSpc>
+                <a:spcPct val="126000"/>
+              </a:lnSpc>
+            </a:pPr>
+            <a:r>
+              <a:rPr sz="1450" b="0" i="0">
+                <a:solidFill>
+                  <a:srgbClr val="21295C"/>
+                </a:solidFill>
+                <a:latin typeface="Arial"/>
+              </a:rPr>
+              <a:t>• Пропущено 61 против 29 из ста. 10 врачей</a:t>
+            </a:r>
+          </a:p>
+          <a:p>
+            <a:pPr algn="l">
+              <a:lnSpc>
+                <a:spcPct val="126000"/>
+              </a:lnSpc>
+            </a:pPr>
+            <a:r>
+              <a:rPr sz="1450" b="0" i="0">
+                <a:solidFill>
+                  <a:srgbClr val="21295C"/>
+                </a:solidFill>
+                <a:latin typeface="Arial"/>
+              </a:rPr>
+              <a:t>• Нашли 22,4 против 28,4 из ста. 1 443 процедуры</a:t>
+            </a:r>
+          </a:p>
+          <a:p>
+            <a:pPr algn="l">
+              <a:lnSpc>
+                <a:spcPct val="126000"/>
+              </a:lnSpc>
+            </a:pPr>
+            <a:r>
+              <a:rPr sz="1450" b="0" i="0">
+                <a:solidFill>
+                  <a:srgbClr val="21295C"/>
+                </a:solidFill>
+                <a:latin typeface="Arial"/>
+              </a:rPr>
+              <a:t>• Отклоняет 90 из ста; из высшей тяжести — 0,5</a:t>
+            </a:r>
+          </a:p>
+          <a:p>
+            <a:pPr algn="l">
+              <a:lnSpc>
+                <a:spcPct val="126000"/>
+              </a:lnSpc>
+            </a:pPr>
+            <a:r>
+              <a:rPr sz="1450" b="0" i="0">
+                <a:solidFill>
+                  <a:srgbClr val="21295C"/>
+                </a:solidFill>
+                <a:latin typeface="Arial"/>
+              </a:rPr>
+              <a:t>• Разборов 5 283 против 3 449. 50 000 женщин</a:t>
+            </a:r>
+          </a:p>
+          <a:p>
+            <a:pPr algn="l">
+              <a:lnSpc>
+                <a:spcPct val="126000"/>
+              </a:lnSpc>
+            </a:pPr>
+            <a:r>
+              <a:rPr sz="1450" b="0" i="0">
+                <a:solidFill>
+                  <a:srgbClr val="21295C"/>
+                </a:solidFill>
+                <a:latin typeface="Arial"/>
+              </a:rPr>
+              <a:t>• Правится 31 из ста. 159 630 кардиограмм</a:t>
+            </a:r>
+          </a:p>
+        </p:txBody>
+      </p:sp>
+      <p:sp>
+        <p:nvSpPr>
+          <p:cNvPr id="13" name="Rounded Rectangle 12"/>
+          <p:cNvSpPr/>
+          <p:nvPr/>
+        </p:nvSpPr>
+        <p:spPr>
+          <a:xfrm>
+            <a:off x="374904" y="4535424"/>
+            <a:ext cx="11441887" cy="938562"/>
+          </a:xfrm>
+          <a:prstGeom prst="roundRect">
+            <a:avLst>
+              <a:gd name="adj" fmla="val 25000"/>
             </a:avLst>
           </a:prstGeom>
           <a:solidFill>
@@ -5553,7 +5801,7 @@
       </p:sp>
       <p:sp>
         <p:nvSpPr>
-          <p:cNvPr id="11" name="TextBox 10"/>
+          <p:cNvPr id="14" name="TextBox 13"/>
           <p:cNvSpPr txBox="1"/>
           <p:nvPr/>
         </p:nvSpPr>
@@ -5620,7 +5868,7 @@
       </p:sp>
       <p:sp>
         <p:nvSpPr>
-          <p:cNvPr id="12" name="Rectangle 11"/>
+          <p:cNvPr id="15" name="Rectangle 14"/>
           <p:cNvSpPr/>
           <p:nvPr/>
         </p:nvSpPr>
@@ -5650,7 +5898,7 @@
       </p:sp>
       <p:sp>
         <p:nvSpPr>
-          <p:cNvPr id="13" name="TextBox 12"/>
+          <p:cNvPr id="16" name="TextBox 15"/>
           <p:cNvSpPr txBox="1"/>
           <p:nvPr/>
         </p:nvSpPr>
@@ -5803,11 +6051,11 @@
         <p:spPr>
           <a:xfrm>
             <a:off x="502920" y="1335024"/>
-            <a:ext cx="4349983" cy="3108960"/>
+            <a:ext cx="2200265" cy="3108960"/>
           </a:xfrm>
           <a:prstGeom prst="roundRect">
             <a:avLst>
-              <a:gd name="adj" fmla="val 9803"/>
+              <a:gd name="adj" fmla="val 13852"/>
             </a:avLst>
           </a:prstGeom>
           <a:solidFill>
@@ -5837,7 +6085,7 @@
         <p:spPr>
           <a:xfrm>
             <a:off x="667512" y="1490472"/>
-            <a:ext cx="4020799" cy="246450"/>
+            <a:ext cx="1871081" cy="246450"/>
           </a:xfrm>
           <a:prstGeom prst="rect">
             <a:avLst/>
@@ -5862,7 +6110,7 @@
                 </a:solidFill>
                 <a:latin typeface="Arial"/>
               </a:rPr>
-              <a:t>Как проявляется</a:t>
+              <a:t>Механизм</a:t>
             </a:r>
           </a:p>
         </p:txBody>
@@ -5876,7 +6124,7 @@
         <p:spPr>
           <a:xfrm>
             <a:off x="667512" y="1846650"/>
-            <a:ext cx="4020799" cy="2441885"/>
+            <a:ext cx="1871081" cy="2441885"/>
           </a:xfrm>
           <a:prstGeom prst="rect">
             <a:avLst/>
@@ -5901,7 +6149,7 @@
                 </a:solidFill>
                 <a:latin typeface="Arial"/>
               </a:rPr>
-              <a:t>• Пациенту сказали про модель</a:t>
+              <a:t>• Раскрытие</a:t>
             </a:r>
           </a:p>
           <a:p>
@@ -5917,7 +6165,7 @@
                 </a:solidFill>
                 <a:latin typeface="Arial"/>
               </a:rPr>
-              <a:t>• Модель — единственный читатель</a:t>
+              <a:t>• Одиночество</a:t>
             </a:r>
           </a:p>
           <a:p>
@@ -5933,7 +6181,7 @@
                 </a:solidFill>
                 <a:latin typeface="Arial"/>
               </a:rPr>
-              <a:t>• Тревогу подняла модель</a:t>
+              <a:t>• Асимметрия</a:t>
             </a:r>
           </a:p>
           <a:p>
@@ -5949,7 +6197,7 @@
                 </a:solidFill>
                 <a:latin typeface="Arial"/>
               </a:rPr>
-              <a:t>• Осмотр моделью без доплаты</a:t>
+              <a:t>• Цена</a:t>
             </a:r>
           </a:p>
           <a:p>
@@ -5965,7 +6213,7 @@
                 </a:solidFill>
                 <a:latin typeface="Arial"/>
               </a:rPr>
-              <a:t>• Автор ответа не назван</a:t>
+              <a:t>• Безымянность</a:t>
             </a:r>
           </a:p>
         </p:txBody>
@@ -5978,8 +6226,8 @@
         </p:nvSpPr>
         <p:spPr>
           <a:xfrm>
-            <a:off x="5163799" y="1335024"/>
-            <a:ext cx="6524975" cy="3108960"/>
+            <a:off x="3014081" y="1335024"/>
+            <a:ext cx="3877254" cy="3108960"/>
           </a:xfrm>
           <a:prstGeom prst="roundRect">
             <a:avLst>
@@ -6012,8 +6260,8 @@
         </p:nvSpPr>
         <p:spPr>
           <a:xfrm>
-            <a:off x="5328391" y="1490472"/>
-            <a:ext cx="6195791" cy="246450"/>
+            <a:off x="3178673" y="1490472"/>
+            <a:ext cx="3548070" cy="246450"/>
           </a:xfrm>
           <a:prstGeom prst="rect">
             <a:avLst/>
@@ -6038,7 +6286,7 @@
                 </a:solidFill>
                 <a:latin typeface="Arial"/>
               </a:rPr>
-              <a:t>Последствия</a:t>
+              <a:t>Объяснение</a:t>
             </a:r>
           </a:p>
         </p:txBody>
@@ -6051,8 +6299,8 @@
         </p:nvSpPr>
         <p:spPr>
           <a:xfrm>
-            <a:off x="5328391" y="1846650"/>
-            <a:ext cx="6195791" cy="2441885"/>
+            <a:off x="3178673" y="1846650"/>
+            <a:ext cx="3548070" cy="2441885"/>
           </a:xfrm>
           <a:prstGeom prst="rect">
             <a:avLst/>
@@ -6077,7 +6325,7 @@
                 </a:solidFill>
                 <a:latin typeface="Arial"/>
               </a:rPr>
-              <a:t>• Доверие к врачу 0,30 против 0,63 из единицы. 1 762 взрослых</a:t>
+              <a:t>• Пациенту сказали про модель</a:t>
             </a:r>
           </a:p>
           <a:p>
@@ -6093,7 +6341,7 @@
                 </a:solidFill>
                 <a:latin typeface="Arial"/>
               </a:rPr>
-              <a:t>• Соглашаются 23 из 518; вторым читателем — 368 из тех же 518</a:t>
+              <a:t>• Модель одну редко, второй — охотно</a:t>
             </a:r>
           </a:p>
           <a:p>
@@ -6109,7 +6357,7 @@
                 </a:solidFill>
                 <a:latin typeface="Arial"/>
               </a:rPr>
-              <a:t>• Врача просят посмотреть 319 из 359; наоборот — 184</a:t>
+              <a:t>• Проверку у врача просит чаще</a:t>
             </a:r>
           </a:p>
           <a:p>
@@ -6125,7 +6373,7 @@
                 </a:solidFill>
                 <a:latin typeface="Arial"/>
               </a:rPr>
-              <a:t>• Без доплаты выбирают 81 из ста, с доплатой — 43. 248 взрослых</a:t>
+              <a:t>• Без доплаты выбирает модель чаще</a:t>
             </a:r>
           </a:p>
           <a:p>
@@ -6141,7 +6389,7 @@
                 </a:solidFill>
                 <a:latin typeface="Arial"/>
               </a:rPr>
-              <a:t>• Сочувствие машины 4,11 против 2,01 из пяти. 45 человек</a:t>
+              <a:t>• Безымянный ответ кажется теплее</a:t>
             </a:r>
           </a:p>
         </p:txBody>
@@ -6154,12 +6402,188 @@
         </p:nvSpPr>
         <p:spPr>
           <a:xfrm>
-            <a:off x="374904" y="4535424"/>
-            <a:ext cx="11441887" cy="1700784"/>
+            <a:off x="7202232" y="1335024"/>
+            <a:ext cx="4486543" cy="3108960"/>
           </a:xfrm>
           <a:prstGeom prst="roundRect">
             <a:avLst>
-              <a:gd name="adj" fmla="val 17921"/>
+              <a:gd name="adj" fmla="val 9803"/>
+            </a:avLst>
+          </a:prstGeom>
+          <a:solidFill>
+            <a:srgbClr val="FFFFFF"/>
+          </a:solidFill>
+          <a:ln w="19050">
+            <a:solidFill>
+              <a:srgbClr val="028090"/>
+            </a:solidFill>
+          </a:ln>
+          <a:effectLst/>
+        </p:spPr>
+        <p:txBody>
+          <a:bodyPr rtlCol="0" anchor="ctr"/>
+          <a:lstStyle/>
+          <a:p>
+            <a:pPr algn="ctr"/>
+          </a:p>
+        </p:txBody>
+      </p:sp>
+      <p:sp>
+        <p:nvSpPr>
+          <p:cNvPr id="11" name="TextBox 10"/>
+          <p:cNvSpPr txBox="1"/>
+          <p:nvPr/>
+        </p:nvSpPr>
+        <p:spPr>
+          <a:xfrm>
+            <a:off x="7366824" y="1490472"/>
+            <a:ext cx="4157359" cy="246450"/>
+          </a:xfrm>
+          <a:prstGeom prst="rect">
+            <a:avLst/>
+          </a:prstGeom>
+          <a:noFill/>
+        </p:spPr>
+        <p:txBody>
+          <a:bodyPr wrap="square" lIns="0" rIns="0" tIns="0" bIns="0" anchor="t">
+            <a:spAutoFit/>
+          </a:bodyPr>
+          <a:lstStyle/>
+          <a:p>
+            <a:pPr algn="l">
+              <a:lnSpc>
+                <a:spcPct val="112000"/>
+              </a:lnSpc>
+            </a:pPr>
+            <a:r>
+              <a:rPr sz="1400" b="1" i="0">
+                <a:solidFill>
+                  <a:srgbClr val="028090"/>
+                </a:solidFill>
+                <a:latin typeface="Arial"/>
+              </a:rPr>
+              <a:t>Последствия</a:t>
+            </a:r>
+          </a:p>
+        </p:txBody>
+      </p:sp>
+      <p:sp>
+        <p:nvSpPr>
+          <p:cNvPr id="12" name="TextBox 11"/>
+          <p:cNvSpPr txBox="1"/>
+          <p:nvPr/>
+        </p:nvSpPr>
+        <p:spPr>
+          <a:xfrm>
+            <a:off x="7366824" y="1846650"/>
+            <a:ext cx="4157359" cy="2441885"/>
+          </a:xfrm>
+          <a:prstGeom prst="rect">
+            <a:avLst/>
+          </a:prstGeom>
+          <a:noFill/>
+        </p:spPr>
+        <p:txBody>
+          <a:bodyPr wrap="square" lIns="0" rIns="0" tIns="0" bIns="0" anchor="t">
+            <a:spAutoFit/>
+          </a:bodyPr>
+          <a:lstStyle/>
+          <a:p>
+            <a:pPr algn="l">
+              <a:lnSpc>
+                <a:spcPct val="126000"/>
+              </a:lnSpc>
+            </a:pPr>
+            <a:r>
+              <a:rPr sz="1450" b="0" i="0">
+                <a:solidFill>
+                  <a:srgbClr val="21295C"/>
+                </a:solidFill>
+                <a:latin typeface="Arial"/>
+              </a:rPr>
+              <a:t>• Доверие 0,30 против 0,63. 1 762 взрослых</a:t>
+            </a:r>
+          </a:p>
+          <a:p>
+            <a:pPr algn="l">
+              <a:lnSpc>
+                <a:spcPct val="126000"/>
+              </a:lnSpc>
+            </a:pPr>
+            <a:r>
+              <a:rPr sz="1450" b="0" i="0">
+                <a:solidFill>
+                  <a:srgbClr val="21295C"/>
+                </a:solidFill>
+                <a:latin typeface="Arial"/>
+              </a:rPr>
+              <a:t>• 23 из 518 одной; 368 из тех же — второй</a:t>
+            </a:r>
+          </a:p>
+          <a:p>
+            <a:pPr algn="l">
+              <a:lnSpc>
+                <a:spcPct val="126000"/>
+              </a:lnSpc>
+            </a:pPr>
+            <a:r>
+              <a:rPr sz="1450" b="0" i="0">
+                <a:solidFill>
+                  <a:srgbClr val="21295C"/>
+                </a:solidFill>
+                <a:latin typeface="Arial"/>
+              </a:rPr>
+              <a:t>• 319 из 359 просят врача; наоборот — 184</a:t>
+            </a:r>
+          </a:p>
+          <a:p>
+            <a:pPr algn="l">
+              <a:lnSpc>
+                <a:spcPct val="126000"/>
+              </a:lnSpc>
+            </a:pPr>
+            <a:r>
+              <a:rPr sz="1450" b="0" i="0">
+                <a:solidFill>
+                  <a:srgbClr val="21295C"/>
+                </a:solidFill>
+                <a:latin typeface="Arial"/>
+              </a:rPr>
+              <a:t>• Без доплаты 81, с ней 43 из ста. 248 взрослых</a:t>
+            </a:r>
+          </a:p>
+          <a:p>
+            <a:pPr algn="l">
+              <a:lnSpc>
+                <a:spcPct val="126000"/>
+              </a:lnSpc>
+            </a:pPr>
+            <a:r>
+              <a:rPr sz="1450" b="0" i="0">
+                <a:solidFill>
+                  <a:srgbClr val="21295C"/>
+                </a:solidFill>
+                <a:latin typeface="Arial"/>
+              </a:rPr>
+              <a:t>• Теплота 4,11 против 2,01 из пяти. 45 человек</a:t>
+            </a:r>
+          </a:p>
+        </p:txBody>
+      </p:sp>
+      <p:sp>
+        <p:nvSpPr>
+          <p:cNvPr id="13" name="Rounded Rectangle 12"/>
+          <p:cNvSpPr/>
+          <p:nvPr/>
+        </p:nvSpPr>
+        <p:spPr>
+          <a:xfrm>
+            <a:off x="374904" y="4535424"/>
+            <a:ext cx="11441887" cy="938562"/>
+          </a:xfrm>
+          <a:prstGeom prst="roundRect">
+            <a:avLst>
+              <a:gd name="adj" fmla="val 25000"/>
             </a:avLst>
           </a:prstGeom>
           <a:solidFill>
@@ -6182,7 +6606,7 @@
       </p:sp>
       <p:sp>
         <p:nvSpPr>
-          <p:cNvPr id="11" name="TextBox 10"/>
+          <p:cNvPr id="14" name="TextBox 13"/>
           <p:cNvSpPr txBox="1"/>
           <p:nvPr/>
         </p:nvSpPr>
@@ -6249,7 +6673,7 @@
       </p:sp>
       <p:sp>
         <p:nvSpPr>
-          <p:cNvPr id="12" name="Rectangle 11"/>
+          <p:cNvPr id="15" name="Rectangle 14"/>
           <p:cNvSpPr/>
           <p:nvPr/>
         </p:nvSpPr>
@@ -6279,7 +6703,7 @@
       </p:sp>
       <p:sp>
         <p:nvSpPr>
-          <p:cNvPr id="13" name="TextBox 12"/>
+          <p:cNvPr id="16" name="TextBox 15"/>
           <p:cNvSpPr txBox="1"/>
           <p:nvPr/>
         </p:nvSpPr>

--- a/library/lectures/lec-07/rework/deck/tri-kadra-o-cheloveke.pptx
+++ b/library/lectures/lec-07/rework/deck/tri-kadra-o-cheloveke.pptx
@@ -686,7 +686,7 @@
           </a:p>
           <a:p>
             <a:r>
-              <a:t>Вторую строку надо произнести вместе с её рычагом, иначе кадр учит бессилию. Семьсот семьдесят пять менеджеров в двух опытах оценивали работу сотрудников после подсказки, и оценки стягивались к подсказке. Величину работа в реферате не печатает, и ставить сюда похожее число из другого опыта нельзя. Зато та же работа называет своим вторым вкладом приём, который якорение снимает: потребовать от человека рассмотреть противоположное. Это не то же, что предупредить. Предупреждение — сообщение, которое человек принимает к сведению и продолжает делать как делал; рассмотрение противоположного — действие, которое он обязан выполнить. Разница между сообщением и действием и есть практический вывод. И тонкость: источник подсказки взаимодействовал с величиной якоря — при высоком якоре человек и модель давали разные оценки, при низком разницы не было. Значит «модель влияет сильнее человека» верно не всегда, и это говорит сама работа.</a:t>
+              <a:t>Вторую строку надо произнести вместе с тем единственным приёмом, который якорение снимает, иначе кадр учит бессилию. Семьсот семьдесят пять менеджеров в двух опытах оценивали работу сотрудников после подсказки, и оценки стягивались к подсказке. Величину работа в реферате не печатает, и ставить сюда похожее число из другого опыта нельзя. Зато та же работа называет своим вторым вкладом приём, который якорение снимает: потребовать от человека рассмотреть противоположное. Это не то же, что предупредить. Предупреждение — сообщение, которое человек принимает к сведению и продолжает делать как делал; рассмотрение противоположного — действие, которое он обязан выполнить. Разница между сообщением и действием и есть практический вывод. И тонкость: источник подсказки взаимодействовал с величиной якоря — при высоком якоре человек и модель давали разные оценки, при низком разницы не было. Значит «модель влияет сильнее человека» верно не всегда, и это говорит сама работа.</a:t>
             </a:r>
           </a:p>
           <a:p>
@@ -4968,7 +4968,7 @@
         <p:spPr>
           <a:xfrm>
             <a:off x="374904" y="5606013"/>
-            <a:ext cx="11441887" cy="579009"/>
+            <a:ext cx="11441887" cy="630194"/>
           </a:xfrm>
           <a:prstGeom prst="roundRect">
             <a:avLst>
@@ -5027,7 +5027,7 @@
                 </a:solidFill>
                 <a:latin typeface="Arial"/>
               </a:rPr>
-              <a:t>У приёма две стороны, и замеры у них разные — дальше разбираем врача и пациента порознь.</a:t>
+              <a:t>У приёма две стороны: у врача мерили поведение на задаче, у пациента — согласие с решением, и это разные предметы измерения.</a:t>
             </a:r>
           </a:p>
         </p:txBody>
@@ -5198,11 +5198,11 @@
         <p:spPr>
           <a:xfrm>
             <a:off x="502920" y="1335024"/>
-            <a:ext cx="2020755" cy="3108960"/>
+            <a:ext cx="11185855" cy="653546"/>
           </a:xfrm>
           <a:prstGeom prst="roundRect">
             <a:avLst>
-              <a:gd name="adj" fmla="val 15083"/>
+              <a:gd name="adj" fmla="val 25000"/>
             </a:avLst>
           </a:prstGeom>
           <a:solidFill>
@@ -5231,8 +5231,8 @@
         </p:nvSpPr>
         <p:spPr>
           <a:xfrm>
-            <a:off x="667512" y="1490472"/>
-            <a:ext cx="1691571" cy="246450"/>
+            <a:off x="594360" y="1426464"/>
+            <a:ext cx="11002975" cy="241892"/>
           </a:xfrm>
           <a:prstGeom prst="rect">
             <a:avLst/>
@@ -5247,17 +5247,17 @@
           <a:p>
             <a:pPr algn="l">
               <a:lnSpc>
-                <a:spcPct val="112000"/>
+                <a:spcPct val="114000"/>
               </a:lnSpc>
             </a:pPr>
             <a:r>
-              <a:rPr sz="1400" b="1" i="0">
+              <a:rPr sz="1350" b="1" i="0">
                 <a:solidFill>
                   <a:srgbClr val="065A82"/>
                 </a:solidFill>
                 <a:latin typeface="Arial"/>
               </a:rPr>
-              <a:t>Механизм</a:t>
+              <a:t>Якорение</a:t>
             </a:r>
           </a:p>
         </p:txBody>
@@ -5270,8 +5270,8 @@
         </p:nvSpPr>
         <p:spPr>
           <a:xfrm>
-            <a:off x="667512" y="1846650"/>
-            <a:ext cx="1691571" cy="2441885"/>
+            <a:off x="594360" y="1695788"/>
+            <a:ext cx="11002975" cy="201341"/>
           </a:xfrm>
           <a:prstGeom prst="rect">
             <a:avLst/>
@@ -5286,97 +5286,17 @@
           <a:p>
             <a:pPr algn="l">
               <a:lnSpc>
-                <a:spcPct val="126000"/>
+                <a:spcPct val="122000"/>
               </a:lnSpc>
             </a:pPr>
             <a:r>
-              <a:rPr sz="1450" b="0" i="0">
+              <a:rPr sz="1050" b="0" i="0">
                 <a:solidFill>
                   <a:srgbClr val="21295C"/>
                 </a:solidFill>
                 <a:latin typeface="Arial"/>
               </a:rPr>
-              <a:t>• Якорение</a:t>
-            </a:r>
-          </a:p>
-          <a:p>
-            <a:pPr algn="l">
-              <a:lnSpc>
-                <a:spcPct val="126000"/>
-              </a:lnSpc>
-            </a:pPr>
-            <a:r>
-              <a:rPr sz="1450" b="0" i="0">
-                <a:solidFill>
-                  <a:srgbClr val="21295C"/>
-                </a:solidFill>
-                <a:latin typeface="Arial"/>
-              </a:rPr>
-              <a:t>• Сужение</a:t>
-            </a:r>
-          </a:p>
-          <a:p>
-            <a:pPr algn="l">
-              <a:lnSpc>
-                <a:spcPct val="126000"/>
-              </a:lnSpc>
-            </a:pPr>
-            <a:r>
-              <a:rPr sz="1450" b="0" i="0">
-                <a:solidFill>
-                  <a:srgbClr val="21295C"/>
-                </a:solidFill>
-                <a:latin typeface="Arial"/>
-              </a:rPr>
-              <a:t>• Износ навыка</a:t>
-            </a:r>
-          </a:p>
-          <a:p>
-            <a:pPr algn="l">
-              <a:lnSpc>
-                <a:spcPct val="126000"/>
-              </a:lnSpc>
-            </a:pPr>
-            <a:r>
-              <a:rPr sz="1450" b="0" i="0">
-                <a:solidFill>
-                  <a:srgbClr val="21295C"/>
-                </a:solidFill>
-                <a:latin typeface="Arial"/>
-              </a:rPr>
-              <a:t>• Поток тревог</a:t>
-            </a:r>
-          </a:p>
-          <a:p>
-            <a:pPr algn="l">
-              <a:lnSpc>
-                <a:spcPct val="126000"/>
-              </a:lnSpc>
-            </a:pPr>
-            <a:r>
-              <a:rPr sz="1450" b="0" i="0">
-                <a:solidFill>
-                  <a:srgbClr val="21295C"/>
-                </a:solidFill>
-                <a:latin typeface="Arial"/>
-              </a:rPr>
-              <a:t>• Несогласие</a:t>
-            </a:r>
-          </a:p>
-          <a:p>
-            <a:pPr algn="l">
-              <a:lnSpc>
-                <a:spcPct val="126000"/>
-              </a:lnSpc>
-            </a:pPr>
-            <a:r>
-              <a:rPr sz="1450" b="0" i="0">
-                <a:solidFill>
-                  <a:srgbClr val="21295C"/>
-                </a:solidFill>
-                <a:latin typeface="Arial"/>
-              </a:rPr>
-              <a:t>• Поправка</a:t>
+              <a:t>Заключение врача сдвигается к подсказке модели, даже заведомо неверной: 23,6 против 92,8 из ста, 220 врачей.</a:t>
             </a:r>
           </a:p>
         </p:txBody>
@@ -5389,392 +5309,8 @@
         </p:nvSpPr>
         <p:spPr>
           <a:xfrm>
-            <a:off x="2834571" y="1335024"/>
-            <a:ext cx="3913175" cy="3108960"/>
-          </a:xfrm>
-          <a:prstGeom prst="roundRect">
-            <a:avLst>
-              <a:gd name="adj" fmla="val 9803"/>
-            </a:avLst>
-          </a:prstGeom>
-          <a:solidFill>
-            <a:srgbClr val="FFFFFF"/>
-          </a:solidFill>
-          <a:ln w="19050">
-            <a:solidFill>
-              <a:srgbClr val="028090"/>
-            </a:solidFill>
-          </a:ln>
-          <a:effectLst/>
-        </p:spPr>
-        <p:txBody>
-          <a:bodyPr rtlCol="0" anchor="ctr"/>
-          <a:lstStyle/>
-          <a:p>
-            <a:pPr algn="ctr"/>
-          </a:p>
-        </p:txBody>
-      </p:sp>
-      <p:sp>
-        <p:nvSpPr>
-          <p:cNvPr id="8" name="TextBox 7"/>
-          <p:cNvSpPr txBox="1"/>
-          <p:nvPr/>
-        </p:nvSpPr>
-        <p:spPr>
-          <a:xfrm>
-            <a:off x="2999163" y="1490472"/>
-            <a:ext cx="3583991" cy="246450"/>
-          </a:xfrm>
-          <a:prstGeom prst="rect">
-            <a:avLst/>
-          </a:prstGeom>
-          <a:noFill/>
-        </p:spPr>
-        <p:txBody>
-          <a:bodyPr wrap="square" lIns="0" rIns="0" tIns="0" bIns="0" anchor="t">
-            <a:spAutoFit/>
-          </a:bodyPr>
-          <a:lstStyle/>
-          <a:p>
-            <a:pPr algn="l">
-              <a:lnSpc>
-                <a:spcPct val="112000"/>
-              </a:lnSpc>
-            </a:pPr>
-            <a:r>
-              <a:rPr sz="1400" b="1" i="0">
-                <a:solidFill>
-                  <a:srgbClr val="028090"/>
-                </a:solidFill>
-                <a:latin typeface="Arial"/>
-              </a:rPr>
-              <a:t>Объяснение</a:t>
-            </a:r>
-          </a:p>
-        </p:txBody>
-      </p:sp>
-      <p:sp>
-        <p:nvSpPr>
-          <p:cNvPr id="9" name="TextBox 8"/>
-          <p:cNvSpPr txBox="1"/>
-          <p:nvPr/>
-        </p:nvSpPr>
-        <p:spPr>
-          <a:xfrm>
-            <a:off x="2999163" y="1846650"/>
-            <a:ext cx="3583991" cy="2441885"/>
-          </a:xfrm>
-          <a:prstGeom prst="rect">
-            <a:avLst/>
-          </a:prstGeom>
-          <a:noFill/>
-        </p:spPr>
-        <p:txBody>
-          <a:bodyPr wrap="square" lIns="0" rIns="0" tIns="0" bIns="0" anchor="t">
-            <a:spAutoFit/>
-          </a:bodyPr>
-          <a:lstStyle/>
-          <a:p>
-            <a:pPr algn="l">
-              <a:lnSpc>
-                <a:spcPct val="126000"/>
-              </a:lnSpc>
-            </a:pPr>
-            <a:r>
-              <a:rPr sz="1450" b="0" i="0">
-                <a:solidFill>
-                  <a:srgbClr val="21295C"/>
-                </a:solidFill>
-                <a:latin typeface="Arial"/>
-              </a:rPr>
-              <a:t>• Отметка модели выходит со снимком</a:t>
-            </a:r>
-          </a:p>
-          <a:p>
-            <a:pPr algn="l">
-              <a:lnSpc>
-                <a:spcPct val="126000"/>
-              </a:lnSpc>
-            </a:pPr>
-            <a:r>
-              <a:rPr sz="1450" b="0" i="0">
-                <a:solidFill>
-                  <a:srgbClr val="21295C"/>
-                </a:solidFill>
-                <a:latin typeface="Arial"/>
-              </a:rPr>
-              <a:t>• Глаз реже стоит там, где модель молчит</a:t>
-            </a:r>
-          </a:p>
-          <a:p>
-            <a:pPr algn="l">
-              <a:lnSpc>
-                <a:spcPct val="126000"/>
-              </a:lnSpc>
-            </a:pPr>
-            <a:r>
-              <a:rPr sz="1450" b="0" i="0">
-                <a:solidFill>
-                  <a:srgbClr val="21295C"/>
-                </a:solidFill>
-                <a:latin typeface="Arial"/>
-              </a:rPr>
-              <a:t>• Без помощника находит меньше</a:t>
-            </a:r>
-          </a:p>
-          <a:p>
-            <a:pPr algn="l">
-              <a:lnSpc>
-                <a:spcPct val="126000"/>
-              </a:lnSpc>
-            </a:pPr>
-            <a:r>
-              <a:rPr sz="1450" b="0" i="0">
-                <a:solidFill>
-                  <a:srgbClr val="21295C"/>
-                </a:solidFill>
-                <a:latin typeface="Arial"/>
-              </a:rPr>
-              <a:t>• Идут потоком, отклоняет подряд</a:t>
-            </a:r>
-          </a:p>
-          <a:p>
-            <a:pPr algn="l">
-              <a:lnSpc>
-                <a:spcPct val="126000"/>
-              </a:lnSpc>
-            </a:pPr>
-            <a:r>
-              <a:rPr sz="1450" b="0" i="0">
-                <a:solidFill>
-                  <a:srgbClr val="21295C"/>
-                </a:solidFill>
-                <a:latin typeface="Arial"/>
-              </a:rPr>
-              <a:t>• Расхождение разбирают отдельно</a:t>
-            </a:r>
-          </a:p>
-          <a:p>
-            <a:pPr algn="l">
-              <a:lnSpc>
-                <a:spcPct val="126000"/>
-              </a:lnSpc>
-            </a:pPr>
-            <a:r>
-              <a:rPr sz="1450" b="0" i="0">
-                <a:solidFill>
-                  <a:srgbClr val="21295C"/>
-                </a:solidFill>
-                <a:latin typeface="Arial"/>
-              </a:rPr>
-              <a:t>• Переписывает машинное заключение</a:t>
-            </a:r>
-          </a:p>
-        </p:txBody>
-      </p:sp>
-      <p:sp>
-        <p:nvSpPr>
-          <p:cNvPr id="10" name="Rounded Rectangle 9"/>
-          <p:cNvSpPr/>
-          <p:nvPr/>
-        </p:nvSpPr>
-        <p:spPr>
-          <a:xfrm>
-            <a:off x="7058643" y="1335024"/>
-            <a:ext cx="4630132" cy="3108960"/>
-          </a:xfrm>
-          <a:prstGeom prst="roundRect">
-            <a:avLst>
-              <a:gd name="adj" fmla="val 9803"/>
-            </a:avLst>
-          </a:prstGeom>
-          <a:solidFill>
-            <a:srgbClr val="FFFFFF"/>
-          </a:solidFill>
-          <a:ln w="19050">
-            <a:solidFill>
-              <a:srgbClr val="028090"/>
-            </a:solidFill>
-          </a:ln>
-          <a:effectLst/>
-        </p:spPr>
-        <p:txBody>
-          <a:bodyPr rtlCol="0" anchor="ctr"/>
-          <a:lstStyle/>
-          <a:p>
-            <a:pPr algn="ctr"/>
-          </a:p>
-        </p:txBody>
-      </p:sp>
-      <p:sp>
-        <p:nvSpPr>
-          <p:cNvPr id="11" name="TextBox 10"/>
-          <p:cNvSpPr txBox="1"/>
-          <p:nvPr/>
-        </p:nvSpPr>
-        <p:spPr>
-          <a:xfrm>
-            <a:off x="7223235" y="1490472"/>
-            <a:ext cx="4300948" cy="246450"/>
-          </a:xfrm>
-          <a:prstGeom prst="rect">
-            <a:avLst/>
-          </a:prstGeom>
-          <a:noFill/>
-        </p:spPr>
-        <p:txBody>
-          <a:bodyPr wrap="square" lIns="0" rIns="0" tIns="0" bIns="0" anchor="t">
-            <a:spAutoFit/>
-          </a:bodyPr>
-          <a:lstStyle/>
-          <a:p>
-            <a:pPr algn="l">
-              <a:lnSpc>
-                <a:spcPct val="112000"/>
-              </a:lnSpc>
-            </a:pPr>
-            <a:r>
-              <a:rPr sz="1400" b="1" i="0">
-                <a:solidFill>
-                  <a:srgbClr val="028090"/>
-                </a:solidFill>
-                <a:latin typeface="Arial"/>
-              </a:rPr>
-              <a:t>Последствия</a:t>
-            </a:r>
-          </a:p>
-        </p:txBody>
-      </p:sp>
-      <p:sp>
-        <p:nvSpPr>
-          <p:cNvPr id="12" name="TextBox 11"/>
-          <p:cNvSpPr txBox="1"/>
-          <p:nvPr/>
-        </p:nvSpPr>
-        <p:spPr>
-          <a:xfrm>
-            <a:off x="7223235" y="1846650"/>
-            <a:ext cx="4300948" cy="2441885"/>
-          </a:xfrm>
-          <a:prstGeom prst="rect">
-            <a:avLst/>
-          </a:prstGeom>
-          <a:noFill/>
-        </p:spPr>
-        <p:txBody>
-          <a:bodyPr wrap="square" lIns="0" rIns="0" tIns="0" bIns="0" anchor="t">
-            <a:spAutoFit/>
-          </a:bodyPr>
-          <a:lstStyle/>
-          <a:p>
-            <a:pPr algn="l">
-              <a:lnSpc>
-                <a:spcPct val="126000"/>
-              </a:lnSpc>
-            </a:pPr>
-            <a:r>
-              <a:rPr sz="1450" b="0" i="0">
-                <a:solidFill>
-                  <a:srgbClr val="21295C"/>
-                </a:solidFill>
-                <a:latin typeface="Arial"/>
-              </a:rPr>
-              <a:t>• 23,6 против 92,8 верных из ста. 220 врачей</a:t>
-            </a:r>
-          </a:p>
-          <a:p>
-            <a:pPr algn="l">
-              <a:lnSpc>
-                <a:spcPct val="126000"/>
-              </a:lnSpc>
-            </a:pPr>
-            <a:r>
-              <a:rPr sz="1450" b="0" i="0">
-                <a:solidFill>
-                  <a:srgbClr val="21295C"/>
-                </a:solidFill>
-                <a:latin typeface="Arial"/>
-              </a:rPr>
-              <a:t>• Пропущено 61 против 29 из ста. 10 врачей</a:t>
-            </a:r>
-          </a:p>
-          <a:p>
-            <a:pPr algn="l">
-              <a:lnSpc>
-                <a:spcPct val="126000"/>
-              </a:lnSpc>
-            </a:pPr>
-            <a:r>
-              <a:rPr sz="1450" b="0" i="0">
-                <a:solidFill>
-                  <a:srgbClr val="21295C"/>
-                </a:solidFill>
-                <a:latin typeface="Arial"/>
-              </a:rPr>
-              <a:t>• Нашли 22,4 против 28,4 из ста. 1 443 процедуры</a:t>
-            </a:r>
-          </a:p>
-          <a:p>
-            <a:pPr algn="l">
-              <a:lnSpc>
-                <a:spcPct val="126000"/>
-              </a:lnSpc>
-            </a:pPr>
-            <a:r>
-              <a:rPr sz="1450" b="0" i="0">
-                <a:solidFill>
-                  <a:srgbClr val="21295C"/>
-                </a:solidFill>
-                <a:latin typeface="Arial"/>
-              </a:rPr>
-              <a:t>• Отклоняет 90 из ста; из высшей тяжести — 0,5</a:t>
-            </a:r>
-          </a:p>
-          <a:p>
-            <a:pPr algn="l">
-              <a:lnSpc>
-                <a:spcPct val="126000"/>
-              </a:lnSpc>
-            </a:pPr>
-            <a:r>
-              <a:rPr sz="1450" b="0" i="0">
-                <a:solidFill>
-                  <a:srgbClr val="21295C"/>
-                </a:solidFill>
-                <a:latin typeface="Arial"/>
-              </a:rPr>
-              <a:t>• Разборов 5 283 против 3 449. 50 000 женщин</a:t>
-            </a:r>
-          </a:p>
-          <a:p>
-            <a:pPr algn="l">
-              <a:lnSpc>
-                <a:spcPct val="126000"/>
-              </a:lnSpc>
-            </a:pPr>
-            <a:r>
-              <a:rPr sz="1450" b="0" i="0">
-                <a:solidFill>
-                  <a:srgbClr val="21295C"/>
-                </a:solidFill>
-                <a:latin typeface="Arial"/>
-              </a:rPr>
-              <a:t>• Правится 31 из ста. 159 630 кардиограмм</a:t>
-            </a:r>
-          </a:p>
-        </p:txBody>
-      </p:sp>
-      <p:sp>
-        <p:nvSpPr>
-          <p:cNvPr id="13" name="Rounded Rectangle 12"/>
-          <p:cNvSpPr/>
-          <p:nvPr/>
-        </p:nvSpPr>
-        <p:spPr>
-          <a:xfrm>
-            <a:off x="374904" y="4535424"/>
-            <a:ext cx="11441887" cy="938562"/>
+            <a:off x="502920" y="2080010"/>
+            <a:ext cx="11185855" cy="653546"/>
           </a:xfrm>
           <a:prstGeom prst="roundRect">
             <a:avLst>
@@ -5801,14 +5337,574 @@
       </p:sp>
       <p:sp>
         <p:nvSpPr>
+          <p:cNvPr id="8" name="TextBox 7"/>
+          <p:cNvSpPr txBox="1"/>
+          <p:nvPr/>
+        </p:nvSpPr>
+        <p:spPr>
+          <a:xfrm>
+            <a:off x="594360" y="2171450"/>
+            <a:ext cx="11002975" cy="241892"/>
+          </a:xfrm>
+          <a:prstGeom prst="rect">
+            <a:avLst/>
+          </a:prstGeom>
+          <a:noFill/>
+        </p:spPr>
+        <p:txBody>
+          <a:bodyPr wrap="square" lIns="0" rIns="0" tIns="0" bIns="0" anchor="t">
+            <a:spAutoFit/>
+          </a:bodyPr>
+          <a:lstStyle/>
+          <a:p>
+            <a:pPr algn="l">
+              <a:lnSpc>
+                <a:spcPct val="114000"/>
+              </a:lnSpc>
+            </a:pPr>
+            <a:r>
+              <a:rPr sz="1350" b="1" i="0">
+                <a:solidFill>
+                  <a:srgbClr val="065A82"/>
+                </a:solidFill>
+                <a:latin typeface="Arial"/>
+              </a:rPr>
+              <a:t>Сужение</a:t>
+            </a:r>
+          </a:p>
+        </p:txBody>
+      </p:sp>
+      <p:sp>
+        <p:nvSpPr>
+          <p:cNvPr id="9" name="TextBox 8"/>
+          <p:cNvSpPr txBox="1"/>
+          <p:nvPr/>
+        </p:nvSpPr>
+        <p:spPr>
+          <a:xfrm>
+            <a:off x="594360" y="2440774"/>
+            <a:ext cx="11002975" cy="201341"/>
+          </a:xfrm>
+          <a:prstGeom prst="rect">
+            <a:avLst/>
+          </a:prstGeom>
+          <a:noFill/>
+        </p:spPr>
+        <p:txBody>
+          <a:bodyPr wrap="square" lIns="0" rIns="0" tIns="0" bIns="0" anchor="t">
+            <a:spAutoFit/>
+          </a:bodyPr>
+          <a:lstStyle/>
+          <a:p>
+            <a:pPr algn="l">
+              <a:lnSpc>
+                <a:spcPct val="122000"/>
+              </a:lnSpc>
+            </a:pPr>
+            <a:r>
+              <a:rPr sz="1050" b="0" i="0">
+                <a:solidFill>
+                  <a:srgbClr val="21295C"/>
+                </a:solidFill>
+                <a:latin typeface="Arial"/>
+              </a:rPr>
+              <a:t>Там, где модель молчит, взгляд врача реже задерживается — пропущено 61 против 29 из ста, 10 врачей.</a:t>
+            </a:r>
+          </a:p>
+        </p:txBody>
+      </p:sp>
+      <p:sp>
+        <p:nvSpPr>
+          <p:cNvPr id="10" name="Rounded Rectangle 9"/>
+          <p:cNvSpPr/>
+          <p:nvPr/>
+        </p:nvSpPr>
+        <p:spPr>
+          <a:xfrm>
+            <a:off x="502920" y="2824996"/>
+            <a:ext cx="11185855" cy="653546"/>
+          </a:xfrm>
+          <a:prstGeom prst="roundRect">
+            <a:avLst>
+              <a:gd name="adj" fmla="val 25000"/>
+            </a:avLst>
+          </a:prstGeom>
+          <a:solidFill>
+            <a:srgbClr val="F4F7FA"/>
+          </a:solidFill>
+          <a:ln w="19050">
+            <a:solidFill>
+              <a:srgbClr val="1C7293"/>
+            </a:solidFill>
+          </a:ln>
+          <a:effectLst/>
+        </p:spPr>
+        <p:txBody>
+          <a:bodyPr rtlCol="0" anchor="ctr"/>
+          <a:lstStyle/>
+          <a:p>
+            <a:pPr algn="ctr"/>
+          </a:p>
+        </p:txBody>
+      </p:sp>
+      <p:sp>
+        <p:nvSpPr>
+          <p:cNvPr id="11" name="TextBox 10"/>
+          <p:cNvSpPr txBox="1"/>
+          <p:nvPr/>
+        </p:nvSpPr>
+        <p:spPr>
+          <a:xfrm>
+            <a:off x="594360" y="2916436"/>
+            <a:ext cx="11002975" cy="241892"/>
+          </a:xfrm>
+          <a:prstGeom prst="rect">
+            <a:avLst/>
+          </a:prstGeom>
+          <a:noFill/>
+        </p:spPr>
+        <p:txBody>
+          <a:bodyPr wrap="square" lIns="0" rIns="0" tIns="0" bIns="0" anchor="t">
+            <a:spAutoFit/>
+          </a:bodyPr>
+          <a:lstStyle/>
+          <a:p>
+            <a:pPr algn="l">
+              <a:lnSpc>
+                <a:spcPct val="114000"/>
+              </a:lnSpc>
+            </a:pPr>
+            <a:r>
+              <a:rPr sz="1350" b="1" i="0">
+                <a:solidFill>
+                  <a:srgbClr val="065A82"/>
+                </a:solidFill>
+                <a:latin typeface="Arial"/>
+              </a:rPr>
+              <a:t>Износ навыка</a:t>
+            </a:r>
+          </a:p>
+        </p:txBody>
+      </p:sp>
+      <p:sp>
+        <p:nvSpPr>
+          <p:cNvPr id="12" name="TextBox 11"/>
+          <p:cNvSpPr txBox="1"/>
+          <p:nvPr/>
+        </p:nvSpPr>
+        <p:spPr>
+          <a:xfrm>
+            <a:off x="594360" y="3185760"/>
+            <a:ext cx="11002975" cy="201341"/>
+          </a:xfrm>
+          <a:prstGeom prst="rect">
+            <a:avLst/>
+          </a:prstGeom>
+          <a:noFill/>
+        </p:spPr>
+        <p:txBody>
+          <a:bodyPr wrap="square" lIns="0" rIns="0" tIns="0" bIns="0" anchor="t">
+            <a:spAutoFit/>
+          </a:bodyPr>
+          <a:lstStyle/>
+          <a:p>
+            <a:pPr algn="l">
+              <a:lnSpc>
+                <a:spcPct val="122000"/>
+              </a:lnSpc>
+            </a:pPr>
+            <a:r>
+              <a:rPr sz="1050" b="0" i="0">
+                <a:solidFill>
+                  <a:srgbClr val="21295C"/>
+                </a:solidFill>
+                <a:latin typeface="Arial"/>
+              </a:rPr>
+              <a:t>Привыкнув к модели, врач без неё находит меньше: 22,4 против 28,4 из ста, 1 443 процедуры.</a:t>
+            </a:r>
+          </a:p>
+        </p:txBody>
+      </p:sp>
+      <p:sp>
+        <p:nvSpPr>
+          <p:cNvPr id="13" name="Rounded Rectangle 12"/>
+          <p:cNvSpPr/>
+          <p:nvPr/>
+        </p:nvSpPr>
+        <p:spPr>
+          <a:xfrm>
+            <a:off x="502920" y="3569982"/>
+            <a:ext cx="11185855" cy="653546"/>
+          </a:xfrm>
+          <a:prstGeom prst="roundRect">
+            <a:avLst>
+              <a:gd name="adj" fmla="val 25000"/>
+            </a:avLst>
+          </a:prstGeom>
+          <a:solidFill>
+            <a:srgbClr val="F4F7FA"/>
+          </a:solidFill>
+          <a:ln w="19050">
+            <a:solidFill>
+              <a:srgbClr val="1C7293"/>
+            </a:solidFill>
+          </a:ln>
+          <a:effectLst/>
+        </p:spPr>
+        <p:txBody>
+          <a:bodyPr rtlCol="0" anchor="ctr"/>
+          <a:lstStyle/>
+          <a:p>
+            <a:pPr algn="ctr"/>
+          </a:p>
+        </p:txBody>
+      </p:sp>
+      <p:sp>
+        <p:nvSpPr>
           <p:cNvPr id="14" name="TextBox 13"/>
           <p:cNvSpPr txBox="1"/>
           <p:nvPr/>
         </p:nvSpPr>
         <p:spPr>
           <a:xfrm>
-            <a:off x="539496" y="4626864"/>
-            <a:ext cx="11112703" cy="1609343"/>
+            <a:off x="594360" y="3661422"/>
+            <a:ext cx="11002975" cy="241892"/>
+          </a:xfrm>
+          <a:prstGeom prst="rect">
+            <a:avLst/>
+          </a:prstGeom>
+          <a:noFill/>
+        </p:spPr>
+        <p:txBody>
+          <a:bodyPr wrap="square" lIns="0" rIns="0" tIns="0" bIns="0" anchor="t">
+            <a:spAutoFit/>
+          </a:bodyPr>
+          <a:lstStyle/>
+          <a:p>
+            <a:pPr algn="l">
+              <a:lnSpc>
+                <a:spcPct val="114000"/>
+              </a:lnSpc>
+            </a:pPr>
+            <a:r>
+              <a:rPr sz="1350" b="1" i="0">
+                <a:solidFill>
+                  <a:srgbClr val="065A82"/>
+                </a:solidFill>
+                <a:latin typeface="Arial"/>
+              </a:rPr>
+              <a:t>Поток тревог</a:t>
+            </a:r>
+          </a:p>
+        </p:txBody>
+      </p:sp>
+      <p:sp>
+        <p:nvSpPr>
+          <p:cNvPr id="15" name="TextBox 14"/>
+          <p:cNvSpPr txBox="1"/>
+          <p:nvPr/>
+        </p:nvSpPr>
+        <p:spPr>
+          <a:xfrm>
+            <a:off x="594360" y="3930746"/>
+            <a:ext cx="11002975" cy="201341"/>
+          </a:xfrm>
+          <a:prstGeom prst="rect">
+            <a:avLst/>
+          </a:prstGeom>
+          <a:noFill/>
+        </p:spPr>
+        <p:txBody>
+          <a:bodyPr wrap="square" lIns="0" rIns="0" tIns="0" bIns="0" anchor="t">
+            <a:spAutoFit/>
+          </a:bodyPr>
+          <a:lstStyle/>
+          <a:p>
+            <a:pPr algn="l">
+              <a:lnSpc>
+                <a:spcPct val="122000"/>
+              </a:lnSpc>
+            </a:pPr>
+            <a:r>
+              <a:rPr sz="1050" b="0" i="0">
+                <a:solidFill>
+                  <a:srgbClr val="21295C"/>
+                </a:solidFill>
+                <a:latin typeface="Arial"/>
+              </a:rPr>
+              <a:t>Модель шлёт тревоги потоком, и врач отклоняет почти все подряд — 90 из ста, из высшей тяжести лишь 0,5.</a:t>
+            </a:r>
+          </a:p>
+        </p:txBody>
+      </p:sp>
+      <p:sp>
+        <p:nvSpPr>
+          <p:cNvPr id="16" name="Rounded Rectangle 15"/>
+          <p:cNvSpPr/>
+          <p:nvPr/>
+        </p:nvSpPr>
+        <p:spPr>
+          <a:xfrm>
+            <a:off x="502920" y="4314968"/>
+            <a:ext cx="11185855" cy="653546"/>
+          </a:xfrm>
+          <a:prstGeom prst="roundRect">
+            <a:avLst>
+              <a:gd name="adj" fmla="val 25000"/>
+            </a:avLst>
+          </a:prstGeom>
+          <a:solidFill>
+            <a:srgbClr val="F4F7FA"/>
+          </a:solidFill>
+          <a:ln w="19050">
+            <a:solidFill>
+              <a:srgbClr val="1C7293"/>
+            </a:solidFill>
+          </a:ln>
+          <a:effectLst/>
+        </p:spPr>
+        <p:txBody>
+          <a:bodyPr rtlCol="0" anchor="ctr"/>
+          <a:lstStyle/>
+          <a:p>
+            <a:pPr algn="ctr"/>
+          </a:p>
+        </p:txBody>
+      </p:sp>
+      <p:sp>
+        <p:nvSpPr>
+          <p:cNvPr id="17" name="TextBox 16"/>
+          <p:cNvSpPr txBox="1"/>
+          <p:nvPr/>
+        </p:nvSpPr>
+        <p:spPr>
+          <a:xfrm>
+            <a:off x="594360" y="4406408"/>
+            <a:ext cx="11002975" cy="241892"/>
+          </a:xfrm>
+          <a:prstGeom prst="rect">
+            <a:avLst/>
+          </a:prstGeom>
+          <a:noFill/>
+        </p:spPr>
+        <p:txBody>
+          <a:bodyPr wrap="square" lIns="0" rIns="0" tIns="0" bIns="0" anchor="t">
+            <a:spAutoFit/>
+          </a:bodyPr>
+          <a:lstStyle/>
+          <a:p>
+            <a:pPr algn="l">
+              <a:lnSpc>
+                <a:spcPct val="114000"/>
+              </a:lnSpc>
+            </a:pPr>
+            <a:r>
+              <a:rPr sz="1350" b="1" i="0">
+                <a:solidFill>
+                  <a:srgbClr val="065A82"/>
+                </a:solidFill>
+                <a:latin typeface="Arial"/>
+              </a:rPr>
+              <a:t>Несогласие</a:t>
+            </a:r>
+          </a:p>
+        </p:txBody>
+      </p:sp>
+      <p:sp>
+        <p:nvSpPr>
+          <p:cNvPr id="18" name="TextBox 17"/>
+          <p:cNvSpPr txBox="1"/>
+          <p:nvPr/>
+        </p:nvSpPr>
+        <p:spPr>
+          <a:xfrm>
+            <a:off x="594360" y="4675732"/>
+            <a:ext cx="11002975" cy="201341"/>
+          </a:xfrm>
+          <a:prstGeom prst="rect">
+            <a:avLst/>
+          </a:prstGeom>
+          <a:noFill/>
+        </p:spPr>
+        <p:txBody>
+          <a:bodyPr wrap="square" lIns="0" rIns="0" tIns="0" bIns="0" anchor="t">
+            <a:spAutoFit/>
+          </a:bodyPr>
+          <a:lstStyle/>
+          <a:p>
+            <a:pPr algn="l">
+              <a:lnSpc>
+                <a:spcPct val="122000"/>
+              </a:lnSpc>
+            </a:pPr>
+            <a:r>
+              <a:rPr sz="1050" b="0" i="0">
+                <a:solidFill>
+                  <a:srgbClr val="21295C"/>
+                </a:solidFill>
+                <a:latin typeface="Arial"/>
+              </a:rPr>
+              <a:t>Расхождение с моделью разбирают отдельным шагом: 3 449 арбитражей без модели против 5 283 с ней, на 50 000 женщин.</a:t>
+            </a:r>
+          </a:p>
+        </p:txBody>
+      </p:sp>
+      <p:sp>
+        <p:nvSpPr>
+          <p:cNvPr id="19" name="Rounded Rectangle 18"/>
+          <p:cNvSpPr/>
+          <p:nvPr/>
+        </p:nvSpPr>
+        <p:spPr>
+          <a:xfrm>
+            <a:off x="502920" y="5059954"/>
+            <a:ext cx="11185855" cy="653546"/>
+          </a:xfrm>
+          <a:prstGeom prst="roundRect">
+            <a:avLst>
+              <a:gd name="adj" fmla="val 25000"/>
+            </a:avLst>
+          </a:prstGeom>
+          <a:solidFill>
+            <a:srgbClr val="F4F7FA"/>
+          </a:solidFill>
+          <a:ln w="19050">
+            <a:solidFill>
+              <a:srgbClr val="1C7293"/>
+            </a:solidFill>
+          </a:ln>
+          <a:effectLst/>
+        </p:spPr>
+        <p:txBody>
+          <a:bodyPr rtlCol="0" anchor="ctr"/>
+          <a:lstStyle/>
+          <a:p>
+            <a:pPr algn="ctr"/>
+          </a:p>
+        </p:txBody>
+      </p:sp>
+      <p:sp>
+        <p:nvSpPr>
+          <p:cNvPr id="20" name="TextBox 19"/>
+          <p:cNvSpPr txBox="1"/>
+          <p:nvPr/>
+        </p:nvSpPr>
+        <p:spPr>
+          <a:xfrm>
+            <a:off x="594360" y="5151394"/>
+            <a:ext cx="11002975" cy="241892"/>
+          </a:xfrm>
+          <a:prstGeom prst="rect">
+            <a:avLst/>
+          </a:prstGeom>
+          <a:noFill/>
+        </p:spPr>
+        <p:txBody>
+          <a:bodyPr wrap="square" lIns="0" rIns="0" tIns="0" bIns="0" anchor="t">
+            <a:spAutoFit/>
+          </a:bodyPr>
+          <a:lstStyle/>
+          <a:p>
+            <a:pPr algn="l">
+              <a:lnSpc>
+                <a:spcPct val="114000"/>
+              </a:lnSpc>
+            </a:pPr>
+            <a:r>
+              <a:rPr sz="1350" b="1" i="0">
+                <a:solidFill>
+                  <a:srgbClr val="065A82"/>
+                </a:solidFill>
+                <a:latin typeface="Arial"/>
+              </a:rPr>
+              <a:t>Поправка</a:t>
+            </a:r>
+          </a:p>
+        </p:txBody>
+      </p:sp>
+      <p:sp>
+        <p:nvSpPr>
+          <p:cNvPr id="21" name="TextBox 20"/>
+          <p:cNvSpPr txBox="1"/>
+          <p:nvPr/>
+        </p:nvSpPr>
+        <p:spPr>
+          <a:xfrm>
+            <a:off x="594360" y="5420718"/>
+            <a:ext cx="11002975" cy="201341"/>
+          </a:xfrm>
+          <a:prstGeom prst="rect">
+            <a:avLst/>
+          </a:prstGeom>
+          <a:noFill/>
+        </p:spPr>
+        <p:txBody>
+          <a:bodyPr wrap="square" lIns="0" rIns="0" tIns="0" bIns="0" anchor="t">
+            <a:spAutoFit/>
+          </a:bodyPr>
+          <a:lstStyle/>
+          <a:p>
+            <a:pPr algn="l">
+              <a:lnSpc>
+                <a:spcPct val="122000"/>
+              </a:lnSpc>
+            </a:pPr>
+            <a:r>
+              <a:rPr sz="1050" b="0" i="0">
+                <a:solidFill>
+                  <a:srgbClr val="21295C"/>
+                </a:solidFill>
+                <a:latin typeface="Arial"/>
+              </a:rPr>
+              <a:t>Здесь наоборот: врач переписывает заключение модели, если находит ошибку — 31 из ста, 159 630 кардиограмм.</a:t>
+            </a:r>
+          </a:p>
+        </p:txBody>
+      </p:sp>
+      <p:sp>
+        <p:nvSpPr>
+          <p:cNvPr id="22" name="Rounded Rectangle 21"/>
+          <p:cNvSpPr/>
+          <p:nvPr/>
+        </p:nvSpPr>
+        <p:spPr>
+          <a:xfrm>
+            <a:off x="374904" y="5804940"/>
+            <a:ext cx="11441887" cy="431267"/>
+          </a:xfrm>
+          <a:prstGeom prst="roundRect">
+            <a:avLst>
+              <a:gd name="adj" fmla="val 25000"/>
+            </a:avLst>
+          </a:prstGeom>
+          <a:solidFill>
+            <a:srgbClr val="F4F7FA"/>
+          </a:solidFill>
+          <a:ln w="19050">
+            <a:solidFill>
+              <a:srgbClr val="1C7293"/>
+            </a:solidFill>
+          </a:ln>
+          <a:effectLst/>
+        </p:spPr>
+        <p:txBody>
+          <a:bodyPr rtlCol="0" anchor="ctr"/>
+          <a:lstStyle/>
+          <a:p>
+            <a:pPr algn="ctr"/>
+          </a:p>
+        </p:txBody>
+      </p:sp>
+      <p:sp>
+        <p:nvSpPr>
+          <p:cNvPr id="23" name="TextBox 22"/>
+          <p:cNvSpPr txBox="1"/>
+          <p:nvPr/>
+        </p:nvSpPr>
+        <p:spPr>
+          <a:xfrm>
+            <a:off x="539496" y="5896380"/>
+            <a:ext cx="11112703" cy="339827"/>
           </a:xfrm>
           <a:prstGeom prst="rect">
             <a:avLst/>
@@ -5833,42 +5929,14 @@
                 </a:solidFill>
                 <a:latin typeface="Arial"/>
               </a:rPr>
-              <a:t>Предупредить врача не помогает. Помогают только действия человека во время работы с моделью или после неё.</a:t>
-            </a:r>
-          </a:p>
-          <a:p>
-            <a:pPr algn="l">
-              <a:lnSpc>
-                <a:spcPct val="118000"/>
-              </a:lnSpc>
-              <a:spcBef>
-                <a:spcPts val="600"/>
-              </a:spcBef>
-            </a:pPr>
-            <a:r>
-              <a:rPr sz="1400" b="0" i="0">
-                <a:solidFill>
-                  <a:srgbClr val="21295C"/>
-                </a:solidFill>
-                <a:latin typeface="Arial"/>
-              </a:rPr>
-              <a:t/>
-            </a:r>
-            <a:r>
-              <a:rPr sz="1400" b="1" i="0">
-                <a:solidFill>
-                  <a:srgbClr val="21295C"/>
-                </a:solidFill>
-                <a:latin typeface="Arial"/>
-              </a:rPr>
-              <a:t>Своего смещения человек не видит.</a:t>
-            </a:r>
-          </a:p>
-        </p:txBody>
-      </p:sp>
-      <p:sp>
-        <p:nvSpPr>
-          <p:cNvPr id="15" name="Rectangle 14"/>
+              <a:t>Предупредить не помогает — помогают только действия человека во время работы с моделью или после неё.</a:t>
+            </a:r>
+          </a:p>
+        </p:txBody>
+      </p:sp>
+      <p:sp>
+        <p:nvSpPr>
+          <p:cNvPr id="24" name="Rectangle 23"/>
           <p:cNvSpPr/>
           <p:nvPr/>
         </p:nvSpPr>
@@ -5898,7 +5966,7 @@
       </p:sp>
       <p:sp>
         <p:nvSpPr>
-          <p:cNvPr id="16" name="TextBox 15"/>
+          <p:cNvPr id="25" name="TextBox 24"/>
           <p:cNvSpPr txBox="1"/>
           <p:nvPr/>
         </p:nvSpPr>
@@ -6051,11 +6119,11 @@
         <p:spPr>
           <a:xfrm>
             <a:off x="502920" y="1335024"/>
-            <a:ext cx="2200265" cy="3108960"/>
+            <a:ext cx="11185855" cy="691896"/>
           </a:xfrm>
           <a:prstGeom prst="roundRect">
             <a:avLst>
-              <a:gd name="adj" fmla="val 13852"/>
+              <a:gd name="adj" fmla="val 25000"/>
             </a:avLst>
           </a:prstGeom>
           <a:solidFill>
@@ -6084,8 +6152,8 @@
         </p:nvSpPr>
         <p:spPr>
           <a:xfrm>
-            <a:off x="667512" y="1490472"/>
-            <a:ext cx="1871081" cy="246450"/>
+            <a:off x="594360" y="1426464"/>
+            <a:ext cx="11002975" cy="241892"/>
           </a:xfrm>
           <a:prstGeom prst="rect">
             <a:avLst/>
@@ -6100,17 +6168,17 @@
           <a:p>
             <a:pPr algn="l">
               <a:lnSpc>
-                <a:spcPct val="112000"/>
+                <a:spcPct val="114000"/>
               </a:lnSpc>
             </a:pPr>
             <a:r>
-              <a:rPr sz="1400" b="1" i="0">
+              <a:rPr sz="1350" b="1" i="0">
                 <a:solidFill>
                   <a:srgbClr val="065A82"/>
                 </a:solidFill>
                 <a:latin typeface="Arial"/>
               </a:rPr>
-              <a:t>Механизм</a:t>
+              <a:t>Раскрытие</a:t>
             </a:r>
           </a:p>
         </p:txBody>
@@ -6123,8 +6191,8 @@
         </p:nvSpPr>
         <p:spPr>
           <a:xfrm>
-            <a:off x="667512" y="1846650"/>
-            <a:ext cx="1871081" cy="2441885"/>
+            <a:off x="594360" y="1695788"/>
+            <a:ext cx="11002975" cy="239692"/>
           </a:xfrm>
           <a:prstGeom prst="rect">
             <a:avLst/>
@@ -6139,81 +6207,17 @@
           <a:p>
             <a:pPr algn="l">
               <a:lnSpc>
-                <a:spcPct val="126000"/>
+                <a:spcPct val="122000"/>
               </a:lnSpc>
             </a:pPr>
             <a:r>
-              <a:rPr sz="1450" b="0" i="0">
+              <a:rPr sz="1250" b="0" i="0">
                 <a:solidFill>
                   <a:srgbClr val="21295C"/>
                 </a:solidFill>
                 <a:latin typeface="Arial"/>
               </a:rPr>
-              <a:t>• Раскрытие</a:t>
-            </a:r>
-          </a:p>
-          <a:p>
-            <a:pPr algn="l">
-              <a:lnSpc>
-                <a:spcPct val="126000"/>
-              </a:lnSpc>
-            </a:pPr>
-            <a:r>
-              <a:rPr sz="1450" b="0" i="0">
-                <a:solidFill>
-                  <a:srgbClr val="21295C"/>
-                </a:solidFill>
-                <a:latin typeface="Arial"/>
-              </a:rPr>
-              <a:t>• Одиночество</a:t>
-            </a:r>
-          </a:p>
-          <a:p>
-            <a:pPr algn="l">
-              <a:lnSpc>
-                <a:spcPct val="126000"/>
-              </a:lnSpc>
-            </a:pPr>
-            <a:r>
-              <a:rPr sz="1450" b="0" i="0">
-                <a:solidFill>
-                  <a:srgbClr val="21295C"/>
-                </a:solidFill>
-                <a:latin typeface="Arial"/>
-              </a:rPr>
-              <a:t>• Асимметрия</a:t>
-            </a:r>
-          </a:p>
-          <a:p>
-            <a:pPr algn="l">
-              <a:lnSpc>
-                <a:spcPct val="126000"/>
-              </a:lnSpc>
-            </a:pPr>
-            <a:r>
-              <a:rPr sz="1450" b="0" i="0">
-                <a:solidFill>
-                  <a:srgbClr val="21295C"/>
-                </a:solidFill>
-                <a:latin typeface="Arial"/>
-              </a:rPr>
-              <a:t>• Цена</a:t>
-            </a:r>
-          </a:p>
-          <a:p>
-            <a:pPr algn="l">
-              <a:lnSpc>
-                <a:spcPct val="126000"/>
-              </a:lnSpc>
-            </a:pPr>
-            <a:r>
-              <a:rPr sz="1450" b="0" i="0">
-                <a:solidFill>
-                  <a:srgbClr val="21295C"/>
-                </a:solidFill>
-                <a:latin typeface="Arial"/>
-              </a:rPr>
-              <a:t>• Безымянность</a:t>
+              <a:t>Когда пациенту говорят, что врач пользуется моделью, доверие к врачу падает: 0,30 против 0,63 у 1 762 взрослых.</a:t>
             </a:r>
           </a:p>
         </p:txBody>
@@ -6226,360 +6230,8 @@
         </p:nvSpPr>
         <p:spPr>
           <a:xfrm>
-            <a:off x="3014081" y="1335024"/>
-            <a:ext cx="3877254" cy="3108960"/>
-          </a:xfrm>
-          <a:prstGeom prst="roundRect">
-            <a:avLst>
-              <a:gd name="adj" fmla="val 9803"/>
-            </a:avLst>
-          </a:prstGeom>
-          <a:solidFill>
-            <a:srgbClr val="FFFFFF"/>
-          </a:solidFill>
-          <a:ln w="19050">
-            <a:solidFill>
-              <a:srgbClr val="028090"/>
-            </a:solidFill>
-          </a:ln>
-          <a:effectLst/>
-        </p:spPr>
-        <p:txBody>
-          <a:bodyPr rtlCol="0" anchor="ctr"/>
-          <a:lstStyle/>
-          <a:p>
-            <a:pPr algn="ctr"/>
-          </a:p>
-        </p:txBody>
-      </p:sp>
-      <p:sp>
-        <p:nvSpPr>
-          <p:cNvPr id="8" name="TextBox 7"/>
-          <p:cNvSpPr txBox="1"/>
-          <p:nvPr/>
-        </p:nvSpPr>
-        <p:spPr>
-          <a:xfrm>
-            <a:off x="3178673" y="1490472"/>
-            <a:ext cx="3548070" cy="246450"/>
-          </a:xfrm>
-          <a:prstGeom prst="rect">
-            <a:avLst/>
-          </a:prstGeom>
-          <a:noFill/>
-        </p:spPr>
-        <p:txBody>
-          <a:bodyPr wrap="square" lIns="0" rIns="0" tIns="0" bIns="0" anchor="t">
-            <a:spAutoFit/>
-          </a:bodyPr>
-          <a:lstStyle/>
-          <a:p>
-            <a:pPr algn="l">
-              <a:lnSpc>
-                <a:spcPct val="112000"/>
-              </a:lnSpc>
-            </a:pPr>
-            <a:r>
-              <a:rPr sz="1400" b="1" i="0">
-                <a:solidFill>
-                  <a:srgbClr val="028090"/>
-                </a:solidFill>
-                <a:latin typeface="Arial"/>
-              </a:rPr>
-              <a:t>Объяснение</a:t>
-            </a:r>
-          </a:p>
-        </p:txBody>
-      </p:sp>
-      <p:sp>
-        <p:nvSpPr>
-          <p:cNvPr id="9" name="TextBox 8"/>
-          <p:cNvSpPr txBox="1"/>
-          <p:nvPr/>
-        </p:nvSpPr>
-        <p:spPr>
-          <a:xfrm>
-            <a:off x="3178673" y="1846650"/>
-            <a:ext cx="3548070" cy="2441885"/>
-          </a:xfrm>
-          <a:prstGeom prst="rect">
-            <a:avLst/>
-          </a:prstGeom>
-          <a:noFill/>
-        </p:spPr>
-        <p:txBody>
-          <a:bodyPr wrap="square" lIns="0" rIns="0" tIns="0" bIns="0" anchor="t">
-            <a:spAutoFit/>
-          </a:bodyPr>
-          <a:lstStyle/>
-          <a:p>
-            <a:pPr algn="l">
-              <a:lnSpc>
-                <a:spcPct val="126000"/>
-              </a:lnSpc>
-            </a:pPr>
-            <a:r>
-              <a:rPr sz="1450" b="0" i="0">
-                <a:solidFill>
-                  <a:srgbClr val="21295C"/>
-                </a:solidFill>
-                <a:latin typeface="Arial"/>
-              </a:rPr>
-              <a:t>• Пациенту сказали про модель</a:t>
-            </a:r>
-          </a:p>
-          <a:p>
-            <a:pPr algn="l">
-              <a:lnSpc>
-                <a:spcPct val="126000"/>
-              </a:lnSpc>
-            </a:pPr>
-            <a:r>
-              <a:rPr sz="1450" b="0" i="0">
-                <a:solidFill>
-                  <a:srgbClr val="21295C"/>
-                </a:solidFill>
-                <a:latin typeface="Arial"/>
-              </a:rPr>
-              <a:t>• Модель одну редко, второй — охотно</a:t>
-            </a:r>
-          </a:p>
-          <a:p>
-            <a:pPr algn="l">
-              <a:lnSpc>
-                <a:spcPct val="126000"/>
-              </a:lnSpc>
-            </a:pPr>
-            <a:r>
-              <a:rPr sz="1450" b="0" i="0">
-                <a:solidFill>
-                  <a:srgbClr val="21295C"/>
-                </a:solidFill>
-                <a:latin typeface="Arial"/>
-              </a:rPr>
-              <a:t>• Проверку у врача просит чаще</a:t>
-            </a:r>
-          </a:p>
-          <a:p>
-            <a:pPr algn="l">
-              <a:lnSpc>
-                <a:spcPct val="126000"/>
-              </a:lnSpc>
-            </a:pPr>
-            <a:r>
-              <a:rPr sz="1450" b="0" i="0">
-                <a:solidFill>
-                  <a:srgbClr val="21295C"/>
-                </a:solidFill>
-                <a:latin typeface="Arial"/>
-              </a:rPr>
-              <a:t>• Без доплаты выбирает модель чаще</a:t>
-            </a:r>
-          </a:p>
-          <a:p>
-            <a:pPr algn="l">
-              <a:lnSpc>
-                <a:spcPct val="126000"/>
-              </a:lnSpc>
-            </a:pPr>
-            <a:r>
-              <a:rPr sz="1450" b="0" i="0">
-                <a:solidFill>
-                  <a:srgbClr val="21295C"/>
-                </a:solidFill>
-                <a:latin typeface="Arial"/>
-              </a:rPr>
-              <a:t>• Безымянный ответ кажется теплее</a:t>
-            </a:r>
-          </a:p>
-        </p:txBody>
-      </p:sp>
-      <p:sp>
-        <p:nvSpPr>
-          <p:cNvPr id="10" name="Rounded Rectangle 9"/>
-          <p:cNvSpPr/>
-          <p:nvPr/>
-        </p:nvSpPr>
-        <p:spPr>
-          <a:xfrm>
-            <a:off x="7202232" y="1335024"/>
-            <a:ext cx="4486543" cy="3108960"/>
-          </a:xfrm>
-          <a:prstGeom prst="roundRect">
-            <a:avLst>
-              <a:gd name="adj" fmla="val 9803"/>
-            </a:avLst>
-          </a:prstGeom>
-          <a:solidFill>
-            <a:srgbClr val="FFFFFF"/>
-          </a:solidFill>
-          <a:ln w="19050">
-            <a:solidFill>
-              <a:srgbClr val="028090"/>
-            </a:solidFill>
-          </a:ln>
-          <a:effectLst/>
-        </p:spPr>
-        <p:txBody>
-          <a:bodyPr rtlCol="0" anchor="ctr"/>
-          <a:lstStyle/>
-          <a:p>
-            <a:pPr algn="ctr"/>
-          </a:p>
-        </p:txBody>
-      </p:sp>
-      <p:sp>
-        <p:nvSpPr>
-          <p:cNvPr id="11" name="TextBox 10"/>
-          <p:cNvSpPr txBox="1"/>
-          <p:nvPr/>
-        </p:nvSpPr>
-        <p:spPr>
-          <a:xfrm>
-            <a:off x="7366824" y="1490472"/>
-            <a:ext cx="4157359" cy="246450"/>
-          </a:xfrm>
-          <a:prstGeom prst="rect">
-            <a:avLst/>
-          </a:prstGeom>
-          <a:noFill/>
-        </p:spPr>
-        <p:txBody>
-          <a:bodyPr wrap="square" lIns="0" rIns="0" tIns="0" bIns="0" anchor="t">
-            <a:spAutoFit/>
-          </a:bodyPr>
-          <a:lstStyle/>
-          <a:p>
-            <a:pPr algn="l">
-              <a:lnSpc>
-                <a:spcPct val="112000"/>
-              </a:lnSpc>
-            </a:pPr>
-            <a:r>
-              <a:rPr sz="1400" b="1" i="0">
-                <a:solidFill>
-                  <a:srgbClr val="028090"/>
-                </a:solidFill>
-                <a:latin typeface="Arial"/>
-              </a:rPr>
-              <a:t>Последствия</a:t>
-            </a:r>
-          </a:p>
-        </p:txBody>
-      </p:sp>
-      <p:sp>
-        <p:nvSpPr>
-          <p:cNvPr id="12" name="TextBox 11"/>
-          <p:cNvSpPr txBox="1"/>
-          <p:nvPr/>
-        </p:nvSpPr>
-        <p:spPr>
-          <a:xfrm>
-            <a:off x="7366824" y="1846650"/>
-            <a:ext cx="4157359" cy="2441885"/>
-          </a:xfrm>
-          <a:prstGeom prst="rect">
-            <a:avLst/>
-          </a:prstGeom>
-          <a:noFill/>
-        </p:spPr>
-        <p:txBody>
-          <a:bodyPr wrap="square" lIns="0" rIns="0" tIns="0" bIns="0" anchor="t">
-            <a:spAutoFit/>
-          </a:bodyPr>
-          <a:lstStyle/>
-          <a:p>
-            <a:pPr algn="l">
-              <a:lnSpc>
-                <a:spcPct val="126000"/>
-              </a:lnSpc>
-            </a:pPr>
-            <a:r>
-              <a:rPr sz="1450" b="0" i="0">
-                <a:solidFill>
-                  <a:srgbClr val="21295C"/>
-                </a:solidFill>
-                <a:latin typeface="Arial"/>
-              </a:rPr>
-              <a:t>• Доверие 0,30 против 0,63. 1 762 взрослых</a:t>
-            </a:r>
-          </a:p>
-          <a:p>
-            <a:pPr algn="l">
-              <a:lnSpc>
-                <a:spcPct val="126000"/>
-              </a:lnSpc>
-            </a:pPr>
-            <a:r>
-              <a:rPr sz="1450" b="0" i="0">
-                <a:solidFill>
-                  <a:srgbClr val="21295C"/>
-                </a:solidFill>
-                <a:latin typeface="Arial"/>
-              </a:rPr>
-              <a:t>• 23 из 518 одной; 368 из тех же — второй</a:t>
-            </a:r>
-          </a:p>
-          <a:p>
-            <a:pPr algn="l">
-              <a:lnSpc>
-                <a:spcPct val="126000"/>
-              </a:lnSpc>
-            </a:pPr>
-            <a:r>
-              <a:rPr sz="1450" b="0" i="0">
-                <a:solidFill>
-                  <a:srgbClr val="21295C"/>
-                </a:solidFill>
-                <a:latin typeface="Arial"/>
-              </a:rPr>
-              <a:t>• 319 из 359 просят врача; наоборот — 184</a:t>
-            </a:r>
-          </a:p>
-          <a:p>
-            <a:pPr algn="l">
-              <a:lnSpc>
-                <a:spcPct val="126000"/>
-              </a:lnSpc>
-            </a:pPr>
-            <a:r>
-              <a:rPr sz="1450" b="0" i="0">
-                <a:solidFill>
-                  <a:srgbClr val="21295C"/>
-                </a:solidFill>
-                <a:latin typeface="Arial"/>
-              </a:rPr>
-              <a:t>• Без доплаты 81, с ней 43 из ста. 248 взрослых</a:t>
-            </a:r>
-          </a:p>
-          <a:p>
-            <a:pPr algn="l">
-              <a:lnSpc>
-                <a:spcPct val="126000"/>
-              </a:lnSpc>
-            </a:pPr>
-            <a:r>
-              <a:rPr sz="1450" b="0" i="0">
-                <a:solidFill>
-                  <a:srgbClr val="21295C"/>
-                </a:solidFill>
-                <a:latin typeface="Arial"/>
-              </a:rPr>
-              <a:t>• Теплота 4,11 против 2,01 из пяти. 45 человек</a:t>
-            </a:r>
-          </a:p>
-        </p:txBody>
-      </p:sp>
-      <p:sp>
-        <p:nvSpPr>
-          <p:cNvPr id="13" name="Rounded Rectangle 12"/>
-          <p:cNvSpPr/>
-          <p:nvPr/>
-        </p:nvSpPr>
-        <p:spPr>
-          <a:xfrm>
-            <a:off x="374904" y="4535424"/>
-            <a:ext cx="11441887" cy="938562"/>
+            <a:off x="502920" y="2118360"/>
+            <a:ext cx="11185855" cy="691896"/>
           </a:xfrm>
           <a:prstGeom prst="roundRect">
             <a:avLst>
@@ -6606,14 +6258,462 @@
       </p:sp>
       <p:sp>
         <p:nvSpPr>
+          <p:cNvPr id="8" name="TextBox 7"/>
+          <p:cNvSpPr txBox="1"/>
+          <p:nvPr/>
+        </p:nvSpPr>
+        <p:spPr>
+          <a:xfrm>
+            <a:off x="594360" y="2209800"/>
+            <a:ext cx="11002975" cy="241892"/>
+          </a:xfrm>
+          <a:prstGeom prst="rect">
+            <a:avLst/>
+          </a:prstGeom>
+          <a:noFill/>
+        </p:spPr>
+        <p:txBody>
+          <a:bodyPr wrap="square" lIns="0" rIns="0" tIns="0" bIns="0" anchor="t">
+            <a:spAutoFit/>
+          </a:bodyPr>
+          <a:lstStyle/>
+          <a:p>
+            <a:pPr algn="l">
+              <a:lnSpc>
+                <a:spcPct val="114000"/>
+              </a:lnSpc>
+            </a:pPr>
+            <a:r>
+              <a:rPr sz="1350" b="1" i="0">
+                <a:solidFill>
+                  <a:srgbClr val="065A82"/>
+                </a:solidFill>
+                <a:latin typeface="Arial"/>
+              </a:rPr>
+              <a:t>Одиночество</a:t>
+            </a:r>
+          </a:p>
+        </p:txBody>
+      </p:sp>
+      <p:sp>
+        <p:nvSpPr>
+          <p:cNvPr id="9" name="TextBox 8"/>
+          <p:cNvSpPr txBox="1"/>
+          <p:nvPr/>
+        </p:nvSpPr>
+        <p:spPr>
+          <a:xfrm>
+            <a:off x="594360" y="2479125"/>
+            <a:ext cx="11002975" cy="239692"/>
+          </a:xfrm>
+          <a:prstGeom prst="rect">
+            <a:avLst/>
+          </a:prstGeom>
+          <a:noFill/>
+        </p:spPr>
+        <p:txBody>
+          <a:bodyPr wrap="square" lIns="0" rIns="0" tIns="0" bIns="0" anchor="t">
+            <a:spAutoFit/>
+          </a:bodyPr>
+          <a:lstStyle/>
+          <a:p>
+            <a:pPr algn="l">
+              <a:lnSpc>
+                <a:spcPct val="122000"/>
+              </a:lnSpc>
+            </a:pPr>
+            <a:r>
+              <a:rPr sz="1250" b="0" i="0">
+                <a:solidFill>
+                  <a:srgbClr val="21295C"/>
+                </a:solidFill>
+                <a:latin typeface="Arial"/>
+              </a:rPr>
+              <a:t>Модель как единственного читателя снимка почти не принимают, а как второе мнение — охотно: 23 против 368 из 518.</a:t>
+            </a:r>
+          </a:p>
+        </p:txBody>
+      </p:sp>
+      <p:sp>
+        <p:nvSpPr>
+          <p:cNvPr id="10" name="Rounded Rectangle 9"/>
+          <p:cNvSpPr/>
+          <p:nvPr/>
+        </p:nvSpPr>
+        <p:spPr>
+          <a:xfrm>
+            <a:off x="502920" y="2901697"/>
+            <a:ext cx="11185855" cy="691896"/>
+          </a:xfrm>
+          <a:prstGeom prst="roundRect">
+            <a:avLst>
+              <a:gd name="adj" fmla="val 25000"/>
+            </a:avLst>
+          </a:prstGeom>
+          <a:solidFill>
+            <a:srgbClr val="F4F7FA"/>
+          </a:solidFill>
+          <a:ln w="19050">
+            <a:solidFill>
+              <a:srgbClr val="1C7293"/>
+            </a:solidFill>
+          </a:ln>
+          <a:effectLst/>
+        </p:spPr>
+        <p:txBody>
+          <a:bodyPr rtlCol="0" anchor="ctr"/>
+          <a:lstStyle/>
+          <a:p>
+            <a:pPr algn="ctr"/>
+          </a:p>
+        </p:txBody>
+      </p:sp>
+      <p:sp>
+        <p:nvSpPr>
+          <p:cNvPr id="11" name="TextBox 10"/>
+          <p:cNvSpPr txBox="1"/>
+          <p:nvPr/>
+        </p:nvSpPr>
+        <p:spPr>
+          <a:xfrm>
+            <a:off x="594360" y="2993137"/>
+            <a:ext cx="11002975" cy="241892"/>
+          </a:xfrm>
+          <a:prstGeom prst="rect">
+            <a:avLst/>
+          </a:prstGeom>
+          <a:noFill/>
+        </p:spPr>
+        <p:txBody>
+          <a:bodyPr wrap="square" lIns="0" rIns="0" tIns="0" bIns="0" anchor="t">
+            <a:spAutoFit/>
+          </a:bodyPr>
+          <a:lstStyle/>
+          <a:p>
+            <a:pPr algn="l">
+              <a:lnSpc>
+                <a:spcPct val="114000"/>
+              </a:lnSpc>
+            </a:pPr>
+            <a:r>
+              <a:rPr sz="1350" b="1" i="0">
+                <a:solidFill>
+                  <a:srgbClr val="065A82"/>
+                </a:solidFill>
+                <a:latin typeface="Arial"/>
+              </a:rPr>
+              <a:t>Асимметрия</a:t>
+            </a:r>
+          </a:p>
+        </p:txBody>
+      </p:sp>
+      <p:sp>
+        <p:nvSpPr>
+          <p:cNvPr id="12" name="TextBox 11"/>
+          <p:cNvSpPr txBox="1"/>
+          <p:nvPr/>
+        </p:nvSpPr>
+        <p:spPr>
+          <a:xfrm>
+            <a:off x="594360" y="3262462"/>
+            <a:ext cx="11002975" cy="239692"/>
+          </a:xfrm>
+          <a:prstGeom prst="rect">
+            <a:avLst/>
+          </a:prstGeom>
+          <a:noFill/>
+        </p:spPr>
+        <p:txBody>
+          <a:bodyPr wrap="square" lIns="0" rIns="0" tIns="0" bIns="0" anchor="t">
+            <a:spAutoFit/>
+          </a:bodyPr>
+          <a:lstStyle/>
+          <a:p>
+            <a:pPr algn="l">
+              <a:lnSpc>
+                <a:spcPct val="122000"/>
+              </a:lnSpc>
+            </a:pPr>
+            <a:r>
+              <a:rPr sz="1250" b="0" i="0">
+                <a:solidFill>
+                  <a:srgbClr val="21295C"/>
+                </a:solidFill>
+                <a:latin typeface="Arial"/>
+              </a:rPr>
+              <a:t>Если тревогу поднимает модель — 319 из 359 просят проверки врача; если тревогу поднимает врач — лишь 184 из 359 просят проверки модели.</a:t>
+            </a:r>
+          </a:p>
+        </p:txBody>
+      </p:sp>
+      <p:sp>
+        <p:nvSpPr>
+          <p:cNvPr id="13" name="Rounded Rectangle 12"/>
+          <p:cNvSpPr/>
+          <p:nvPr/>
+        </p:nvSpPr>
+        <p:spPr>
+          <a:xfrm>
+            <a:off x="502920" y="3685034"/>
+            <a:ext cx="11185855" cy="691896"/>
+          </a:xfrm>
+          <a:prstGeom prst="roundRect">
+            <a:avLst>
+              <a:gd name="adj" fmla="val 25000"/>
+            </a:avLst>
+          </a:prstGeom>
+          <a:solidFill>
+            <a:srgbClr val="F4F7FA"/>
+          </a:solidFill>
+          <a:ln w="19050">
+            <a:solidFill>
+              <a:srgbClr val="1C7293"/>
+            </a:solidFill>
+          </a:ln>
+          <a:effectLst/>
+        </p:spPr>
+        <p:txBody>
+          <a:bodyPr rtlCol="0" anchor="ctr"/>
+          <a:lstStyle/>
+          <a:p>
+            <a:pPr algn="ctr"/>
+          </a:p>
+        </p:txBody>
+      </p:sp>
+      <p:sp>
+        <p:nvSpPr>
           <p:cNvPr id="14" name="TextBox 13"/>
           <p:cNvSpPr txBox="1"/>
           <p:nvPr/>
         </p:nvSpPr>
         <p:spPr>
           <a:xfrm>
-            <a:off x="539496" y="4626864"/>
-            <a:ext cx="11112703" cy="1609343"/>
+            <a:off x="594360" y="3776474"/>
+            <a:ext cx="11002975" cy="241892"/>
+          </a:xfrm>
+          <a:prstGeom prst="rect">
+            <a:avLst/>
+          </a:prstGeom>
+          <a:noFill/>
+        </p:spPr>
+        <p:txBody>
+          <a:bodyPr wrap="square" lIns="0" rIns="0" tIns="0" bIns="0" anchor="t">
+            <a:spAutoFit/>
+          </a:bodyPr>
+          <a:lstStyle/>
+          <a:p>
+            <a:pPr algn="l">
+              <a:lnSpc>
+                <a:spcPct val="114000"/>
+              </a:lnSpc>
+            </a:pPr>
+            <a:r>
+              <a:rPr sz="1350" b="1" i="0">
+                <a:solidFill>
+                  <a:srgbClr val="065A82"/>
+                </a:solidFill>
+                <a:latin typeface="Arial"/>
+              </a:rPr>
+              <a:t>Цена</a:t>
+            </a:r>
+          </a:p>
+        </p:txBody>
+      </p:sp>
+      <p:sp>
+        <p:nvSpPr>
+          <p:cNvPr id="15" name="TextBox 14"/>
+          <p:cNvSpPr txBox="1"/>
+          <p:nvPr/>
+        </p:nvSpPr>
+        <p:spPr>
+          <a:xfrm>
+            <a:off x="594360" y="4045799"/>
+            <a:ext cx="11002975" cy="239692"/>
+          </a:xfrm>
+          <a:prstGeom prst="rect">
+            <a:avLst/>
+          </a:prstGeom>
+          <a:noFill/>
+        </p:spPr>
+        <p:txBody>
+          <a:bodyPr wrap="square" lIns="0" rIns="0" tIns="0" bIns="0" anchor="t">
+            <a:spAutoFit/>
+          </a:bodyPr>
+          <a:lstStyle/>
+          <a:p>
+            <a:pPr algn="l">
+              <a:lnSpc>
+                <a:spcPct val="122000"/>
+              </a:lnSpc>
+            </a:pPr>
+            <a:r>
+              <a:rPr sz="1250" b="0" i="0">
+                <a:solidFill>
+                  <a:srgbClr val="21295C"/>
+                </a:solidFill>
+                <a:latin typeface="Arial"/>
+              </a:rPr>
+              <a:t>Когда осмотр моделью бесплатен, её выбирают заметно чаще — 81 против 43 из ста, 248 взрослых.</a:t>
+            </a:r>
+          </a:p>
+        </p:txBody>
+      </p:sp>
+      <p:sp>
+        <p:nvSpPr>
+          <p:cNvPr id="16" name="Rounded Rectangle 15"/>
+          <p:cNvSpPr/>
+          <p:nvPr/>
+        </p:nvSpPr>
+        <p:spPr>
+          <a:xfrm>
+            <a:off x="502920" y="4468371"/>
+            <a:ext cx="11185855" cy="691896"/>
+          </a:xfrm>
+          <a:prstGeom prst="roundRect">
+            <a:avLst>
+              <a:gd name="adj" fmla="val 25000"/>
+            </a:avLst>
+          </a:prstGeom>
+          <a:solidFill>
+            <a:srgbClr val="F4F7FA"/>
+          </a:solidFill>
+          <a:ln w="19050">
+            <a:solidFill>
+              <a:srgbClr val="1C7293"/>
+            </a:solidFill>
+          </a:ln>
+          <a:effectLst/>
+        </p:spPr>
+        <p:txBody>
+          <a:bodyPr rtlCol="0" anchor="ctr"/>
+          <a:lstStyle/>
+          <a:p>
+            <a:pPr algn="ctr"/>
+          </a:p>
+        </p:txBody>
+      </p:sp>
+      <p:sp>
+        <p:nvSpPr>
+          <p:cNvPr id="17" name="TextBox 16"/>
+          <p:cNvSpPr txBox="1"/>
+          <p:nvPr/>
+        </p:nvSpPr>
+        <p:spPr>
+          <a:xfrm>
+            <a:off x="594360" y="4559811"/>
+            <a:ext cx="11002975" cy="241892"/>
+          </a:xfrm>
+          <a:prstGeom prst="rect">
+            <a:avLst/>
+          </a:prstGeom>
+          <a:noFill/>
+        </p:spPr>
+        <p:txBody>
+          <a:bodyPr wrap="square" lIns="0" rIns="0" tIns="0" bIns="0" anchor="t">
+            <a:spAutoFit/>
+          </a:bodyPr>
+          <a:lstStyle/>
+          <a:p>
+            <a:pPr algn="l">
+              <a:lnSpc>
+                <a:spcPct val="114000"/>
+              </a:lnSpc>
+            </a:pPr>
+            <a:r>
+              <a:rPr sz="1350" b="1" i="0">
+                <a:solidFill>
+                  <a:srgbClr val="065A82"/>
+                </a:solidFill>
+                <a:latin typeface="Arial"/>
+              </a:rPr>
+              <a:t>Безымянность</a:t>
+            </a:r>
+          </a:p>
+        </p:txBody>
+      </p:sp>
+      <p:sp>
+        <p:nvSpPr>
+          <p:cNvPr id="18" name="TextBox 17"/>
+          <p:cNvSpPr txBox="1"/>
+          <p:nvPr/>
+        </p:nvSpPr>
+        <p:spPr>
+          <a:xfrm>
+            <a:off x="594360" y="4829135"/>
+            <a:ext cx="11002975" cy="239692"/>
+          </a:xfrm>
+          <a:prstGeom prst="rect">
+            <a:avLst/>
+          </a:prstGeom>
+          <a:noFill/>
+        </p:spPr>
+        <p:txBody>
+          <a:bodyPr wrap="square" lIns="0" rIns="0" tIns="0" bIns="0" anchor="t">
+            <a:spAutoFit/>
+          </a:bodyPr>
+          <a:lstStyle/>
+          <a:p>
+            <a:pPr algn="l">
+              <a:lnSpc>
+                <a:spcPct val="122000"/>
+              </a:lnSpc>
+            </a:pPr>
+            <a:r>
+              <a:rPr sz="1250" b="0" i="0">
+                <a:solidFill>
+                  <a:srgbClr val="21295C"/>
+                </a:solidFill>
+                <a:latin typeface="Arial"/>
+              </a:rPr>
+              <a:t>Без подписи автора ответ модели кажется более сочувственным, чем ответ врача: 4,11 против 2,01 из пяти, 45 человек.</a:t>
+            </a:r>
+          </a:p>
+        </p:txBody>
+      </p:sp>
+      <p:sp>
+        <p:nvSpPr>
+          <p:cNvPr id="19" name="Rounded Rectangle 18"/>
+          <p:cNvSpPr/>
+          <p:nvPr/>
+        </p:nvSpPr>
+        <p:spPr>
+          <a:xfrm>
+            <a:off x="374904" y="5251708"/>
+            <a:ext cx="11441887" cy="938562"/>
+          </a:xfrm>
+          <a:prstGeom prst="roundRect">
+            <a:avLst>
+              <a:gd name="adj" fmla="val 25000"/>
+            </a:avLst>
+          </a:prstGeom>
+          <a:solidFill>
+            <a:srgbClr val="F4F7FA"/>
+          </a:solidFill>
+          <a:ln w="19050">
+            <a:solidFill>
+              <a:srgbClr val="1C7293"/>
+            </a:solidFill>
+          </a:ln>
+          <a:effectLst/>
+        </p:spPr>
+        <p:txBody>
+          <a:bodyPr rtlCol="0" anchor="ctr"/>
+          <a:lstStyle/>
+          <a:p>
+            <a:pPr algn="ctr"/>
+          </a:p>
+        </p:txBody>
+      </p:sp>
+      <p:sp>
+        <p:nvSpPr>
+          <p:cNvPr id="20" name="TextBox 19"/>
+          <p:cNvSpPr txBox="1"/>
+          <p:nvPr/>
+        </p:nvSpPr>
+        <p:spPr>
+          <a:xfrm>
+            <a:off x="539496" y="5343148"/>
+            <a:ext cx="11112703" cy="893059"/>
           </a:xfrm>
           <a:prstGeom prst="rect">
             <a:avLst/>
@@ -6673,7 +6773,7 @@
       </p:sp>
       <p:sp>
         <p:nvSpPr>
-          <p:cNvPr id="15" name="Rectangle 14"/>
+          <p:cNvPr id="21" name="Rectangle 20"/>
           <p:cNvSpPr/>
           <p:nvPr/>
         </p:nvSpPr>
@@ -6703,7 +6803,7 @@
       </p:sp>
       <p:sp>
         <p:nvSpPr>
-          <p:cNvPr id="16" name="TextBox 15"/>
+          <p:cNvPr id="22" name="TextBox 21"/>
           <p:cNvSpPr txBox="1"/>
           <p:nvPr/>
         </p:nvSpPr>
